--- a/teaching/slides/day2_conduct.pptx
+++ b/teaching/slides/day2_conduct.pptx
@@ -9818,7 +9818,7 @@
               </a:spcAft>
             </a:pPr>
             <a:r>
-              <a:rPr sz="1900" b="0" i="0">
+              <a:rPr sz="1900" b="1" i="0">
                 <a:solidFill>
                   <a:srgbClr val="222222"/>
                 </a:solidFill>

--- a/teaching/slides/day2_conduct.pptx
+++ b/teaching/slides/day2_conduct.pptx
@@ -61,6 +61,8 @@
     <p:sldId id="309" r:id="rId60"/>
     <p:sldId id="310" r:id="rId61"/>
     <p:sldId id="311" r:id="rId62"/>
+    <p:sldId id="312" r:id="rId63"/>
+    <p:sldId id="313" r:id="rId64"/>
   </p:sldIdLst>
   <p:sldSz cx="12191695" cy="6858000" type="screen4x3"/>
   <p:notesSz cx="6858000" cy="9144000"/>
@@ -13766,7 +13768,7 @@
         <p:spPr>
           <a:xfrm>
             <a:off x="0" y="0"/>
-            <a:ext cx="12191695" cy="6858000"/>
+            <a:ext cx="12191695" cy="960120"/>
           </a:xfrm>
           <a:prstGeom prst="rect">
             <a:avLst/>
@@ -13803,20 +13805,62 @@
       </p:sp>
       <p:sp>
         <p:nvSpPr>
-          <p:cNvPr id="3" name="Rectangle 2"/>
+          <p:cNvPr id="3" name="TextBox 2"/>
+          <p:cNvSpPr txBox="1"/>
+          <p:nvPr/>
+        </p:nvSpPr>
+        <p:spPr>
+          <a:xfrm>
+            <a:off x="457200" y="109728"/>
+            <a:ext cx="11247120" cy="731520"/>
+          </a:xfrm>
+          <a:prstGeom prst="rect">
+            <a:avLst/>
+          </a:prstGeom>
+          <a:noFill/>
+        </p:spPr>
+        <p:txBody>
+          <a:bodyPr wrap="square" anchor="ctr">
+            <a:spAutoFit/>
+          </a:bodyPr>
+          <a:lstStyle/>
+          <a:p>
+            <a:pPr algn="l">
+              <a:lnSpc>
+                <a:spcPct val="100000"/>
+              </a:lnSpc>
+              <a:spcAft>
+                <a:spcPts val="600"/>
+              </a:spcAft>
+            </a:pPr>
+            <a:r>
+              <a:rPr sz="2800" b="1" i="0">
+                <a:solidFill>
+                  <a:srgbClr val="FFFFFF"/>
+                </a:solidFill>
+                <a:latin typeface="Calibri"/>
+              </a:rPr>
+              <a:t>US v. Microsoft — the conduct (Fisher's analysis)</a:t>
+            </a:r>
+          </a:p>
+        </p:txBody>
+      </p:sp>
+      <p:sp>
+        <p:nvSpPr>
+          <p:cNvPr id="4" name="Rectangle 3"/>
           <p:cNvSpPr/>
           <p:nvPr/>
         </p:nvSpPr>
         <p:spPr>
           <a:xfrm>
-            <a:off x="731520" y="3200400"/>
-            <a:ext cx="3657600" cy="54864"/>
+            <a:off x="548640" y="1188720"/>
+            <a:ext cx="1463040" cy="457200"/>
           </a:xfrm>
           <a:prstGeom prst="rect">
             <a:avLst/>
           </a:prstGeom>
           <a:solidFill>
-            <a:srgbClr val="FFFFFF"/>
+            <a:srgbClr val="0072B2"/>
           </a:solidFill>
           <a:ln>
             <a:noFill/>
@@ -13847,27 +13891,27 @@
       </p:sp>
       <p:sp>
         <p:nvSpPr>
-          <p:cNvPr id="4" name="TextBox 3"/>
-          <p:cNvSpPr txBox="1"/>
-          <p:nvPr/>
-        </p:nvSpPr>
-        <p:spPr>
-          <a:xfrm>
-            <a:off x="731520" y="2194560"/>
-            <a:ext cx="10698480" cy="1371600"/>
-          </a:xfrm>
-          <a:prstGeom prst="rect">
-            <a:avLst/>
-          </a:prstGeom>
-          <a:noFill/>
-        </p:spPr>
-        <p:txBody>
-          <a:bodyPr wrap="square" anchor="b">
-            <a:spAutoFit/>
-          </a:bodyPr>
-          <a:lstStyle/>
-          <a:p>
-            <a:pPr algn="l">
+          <p:cNvPr id="5" name="TextBox 4"/>
+          <p:cNvSpPr txBox="1"/>
+          <p:nvPr/>
+        </p:nvSpPr>
+        <p:spPr>
+          <a:xfrm>
+            <a:off x="548640" y="1207008"/>
+            <a:ext cx="1463040" cy="420624"/>
+          </a:xfrm>
+          <a:prstGeom prst="rect">
+            <a:avLst/>
+          </a:prstGeom>
+          <a:noFill/>
+        </p:spPr>
+        <p:txBody>
+          <a:bodyPr wrap="square" anchor="ctr">
+            <a:spAutoFit/>
+          </a:bodyPr>
+          <a:lstStyle/>
+          <a:p>
+            <a:pPr algn="ctr">
               <a:lnSpc>
                 <a:spcPct val="100000"/>
               </a:lnSpc>
@@ -13876,27 +13920,69 @@
               </a:spcAft>
             </a:pPr>
             <a:r>
-              <a:rPr sz="3400" b="1" i="0">
+              <a:rPr sz="1800" b="1" i="0">
                 <a:solidFill>
                   <a:srgbClr val="FFFFFF"/>
                 </a:solidFill>
                 <a:latin typeface="Calibri"/>
               </a:rPr>
-              <a:t>Module 2.4 — Antitrust and labour markets</a:t>
-            </a:r>
-          </a:p>
-        </p:txBody>
-      </p:sp>
-      <p:sp>
-        <p:nvSpPr>
-          <p:cNvPr id="5" name="TextBox 4"/>
-          <p:cNvSpPr txBox="1"/>
-          <p:nvPr/>
-        </p:nvSpPr>
-        <p:spPr>
-          <a:xfrm>
-            <a:off x="731520" y="3383280"/>
-            <a:ext cx="10698480" cy="1097280"/>
+              <a:t>US</a:t>
+            </a:r>
+          </a:p>
+        </p:txBody>
+      </p:sp>
+      <p:sp>
+        <p:nvSpPr>
+          <p:cNvPr id="6" name="TextBox 5"/>
+          <p:cNvSpPr txBox="1"/>
+          <p:nvPr/>
+        </p:nvSpPr>
+        <p:spPr>
+          <a:xfrm>
+            <a:off x="2194560" y="1188720"/>
+            <a:ext cx="9418320" cy="548640"/>
+          </a:xfrm>
+          <a:prstGeom prst="rect">
+            <a:avLst/>
+          </a:prstGeom>
+          <a:noFill/>
+        </p:spPr>
+        <p:txBody>
+          <a:bodyPr wrap="square" anchor="ctr">
+            <a:spAutoFit/>
+          </a:bodyPr>
+          <a:lstStyle/>
+          <a:p>
+            <a:pPr algn="l">
+              <a:lnSpc>
+                <a:spcPct val="100000"/>
+              </a:lnSpc>
+              <a:spcAft>
+                <a:spcPts val="600"/>
+              </a:spcAft>
+            </a:pPr>
+            <a:r>
+              <a:rPr sz="1800" b="1" i="0">
+                <a:solidFill>
+                  <a:srgbClr val="0072B2"/>
+                </a:solidFill>
+                <a:latin typeface="Calibri"/>
+              </a:rPr>
+              <a:t>The canonical §2 monopoly-maintenance case</a:t>
+            </a:r>
+          </a:p>
+        </p:txBody>
+      </p:sp>
+      <p:sp>
+        <p:nvSpPr>
+          <p:cNvPr id="7" name="TextBox 6"/>
+          <p:cNvSpPr txBox="1"/>
+          <p:nvPr/>
+        </p:nvSpPr>
+        <p:spPr>
+          <a:xfrm>
+            <a:off x="548640" y="1920240"/>
+            <a:ext cx="11064240" cy="3108960"/>
           </a:xfrm>
           <a:prstGeom prst="rect">
             <a:avLst/>
@@ -13911,6 +13997,202 @@
           <a:p>
             <a:pPr algn="l">
               <a:lnSpc>
+                <a:spcPct val="104000"/>
+              </a:lnSpc>
+              <a:spcAft>
+                <a:spcPts val="700"/>
+              </a:spcAft>
+            </a:pPr>
+            <a:r>
+              <a:rPr sz="1500" b="1" i="0">
+                <a:solidFill>
+                  <a:srgbClr val="555555"/>
+                </a:solidFill>
+                <a:latin typeface="Calibri"/>
+              </a:rPr>
+              <a:t>Facts &amp; analysis</a:t>
+            </a:r>
+          </a:p>
+          <a:p>
+            <a:pPr algn="l">
+              <a:lnSpc>
+                <a:spcPct val="104000"/>
+              </a:lnSpc>
+              <a:spcAft>
+                <a:spcPts val="700"/>
+              </a:spcAft>
+            </a:pPr>
+            <a:r>
+              <a:rPr sz="1600" b="0" i="0">
+                <a:solidFill>
+                  <a:srgbClr val="222222"/>
+                </a:solidFill>
+                <a:latin typeface="Calibri"/>
+              </a:rPr>
+              <a:t>•  Monopoly power: ~95% of Intel-compatible PC operating systems; sustained high margins; the 'applications barrier to entry' (developers write for Windows because users are on Windows) protects the position — MIT's Franklin Fisher for the DOJ.</a:t>
+            </a:r>
+          </a:p>
+          <a:p>
+            <a:pPr algn="l">
+              <a:lnSpc>
+                <a:spcPct val="104000"/>
+              </a:lnSpc>
+              <a:spcAft>
+                <a:spcPts val="700"/>
+              </a:spcAft>
+            </a:pPr>
+            <a:r>
+              <a:rPr sz="1600" b="0" i="0">
+                <a:solidFill>
+                  <a:srgbClr val="222222"/>
+                </a:solidFill>
+                <a:latin typeface="Calibri"/>
+              </a:rPr>
+              <a:t>•  The browser threat: Netscape + Java threatened a cross-platform layer that would erode the applications barrier — so Microsoft moved to foreclose it.</a:t>
+            </a:r>
+          </a:p>
+          <a:p>
+            <a:pPr algn="l">
+              <a:lnSpc>
+                <a:spcPct val="104000"/>
+              </a:lnSpc>
+              <a:spcAft>
+                <a:spcPts val="700"/>
+              </a:spcAft>
+            </a:pPr>
+            <a:r>
+              <a:rPr sz="1600" b="0" i="0">
+                <a:solidFill>
+                  <a:srgbClr val="222222"/>
+                </a:solidFill>
+                <a:latin typeface="Calibri"/>
+              </a:rPr>
+              <a:t>•  The conduct: bundling IE into Windows at zero marginal price; OEM restrictions (no removing IE / promoting rivals); exclusive ISP &amp; content deals; technical integration — 'embrace, extend, extinguish'.</a:t>
+            </a:r>
+          </a:p>
+        </p:txBody>
+      </p:sp>
+      <p:sp>
+        <p:nvSpPr>
+          <p:cNvPr id="8" name="Rectangle 7"/>
+          <p:cNvSpPr/>
+          <p:nvPr/>
+        </p:nvSpPr>
+        <p:spPr>
+          <a:xfrm>
+            <a:off x="548640" y="5212080"/>
+            <a:ext cx="11064240" cy="1005840"/>
+          </a:xfrm>
+          <a:prstGeom prst="rect">
+            <a:avLst/>
+          </a:prstGeom>
+          <a:solidFill>
+            <a:srgbClr val="F2F2F2"/>
+          </a:solidFill>
+          <a:ln w="12700">
+            <a:solidFill>
+              <a:srgbClr val="0072B2"/>
+            </a:solidFill>
+          </a:ln>
+          <a:effectLst/>
+        </p:spPr>
+        <p:style>
+          <a:lnRef idx="1">
+            <a:schemeClr val="accent1"/>
+          </a:lnRef>
+          <a:fillRef idx="3">
+            <a:schemeClr val="accent1"/>
+          </a:fillRef>
+          <a:effectRef idx="2">
+            <a:schemeClr val="accent1"/>
+          </a:effectRef>
+          <a:fontRef idx="minor">
+            <a:schemeClr val="lt1"/>
+          </a:fontRef>
+        </p:style>
+        <p:txBody>
+          <a:bodyPr rtlCol="0" anchor="ctr"/>
+          <a:lstStyle/>
+          <a:p>
+            <a:pPr algn="ctr"/>
+          </a:p>
+        </p:txBody>
+      </p:sp>
+      <p:sp>
+        <p:nvSpPr>
+          <p:cNvPr id="9" name="TextBox 8"/>
+          <p:cNvSpPr txBox="1"/>
+          <p:nvPr/>
+        </p:nvSpPr>
+        <p:spPr>
+          <a:xfrm>
+            <a:off x="731520" y="5303520"/>
+            <a:ext cx="10698480" cy="868680"/>
+          </a:xfrm>
+          <a:prstGeom prst="rect">
+            <a:avLst/>
+          </a:prstGeom>
+          <a:noFill/>
+        </p:spPr>
+        <p:txBody>
+          <a:bodyPr wrap="square" anchor="ctr">
+            <a:spAutoFit/>
+          </a:bodyPr>
+          <a:lstStyle/>
+          <a:p>
+            <a:pPr algn="l">
+              <a:lnSpc>
+                <a:spcPct val="103000"/>
+              </a:lnSpc>
+              <a:spcAft>
+                <a:spcPts val="600"/>
+              </a:spcAft>
+            </a:pPr>
+            <a:r>
+              <a:rPr sz="1600" b="1" i="0">
+                <a:solidFill>
+                  <a:srgbClr val="0072B2"/>
+                </a:solidFill>
+                <a:latin typeface="Calibri"/>
+              </a:rPr>
+              <a:t>Why it matters:  </a:t>
+            </a:r>
+            <a:r>
+              <a:rPr sz="1600" b="0" i="0">
+                <a:solidFill>
+                  <a:srgbClr val="222222"/>
+                </a:solidFill>
+                <a:latin typeface="Calibri"/>
+              </a:rPr>
+              <a:t>The harm was to the competitive process and innovation (maintaining the OS monopoly), not a simple price rise — the template for platform-monopoly theory.</a:t>
+            </a:r>
+          </a:p>
+        </p:txBody>
+      </p:sp>
+      <p:sp>
+        <p:nvSpPr>
+          <p:cNvPr id="10" name="TextBox 9"/>
+          <p:cNvSpPr txBox="1"/>
+          <p:nvPr/>
+        </p:nvSpPr>
+        <p:spPr>
+          <a:xfrm>
+            <a:off x="457200" y="6446520"/>
+            <a:ext cx="11247120" cy="320040"/>
+          </a:xfrm>
+          <a:prstGeom prst="rect">
+            <a:avLst/>
+          </a:prstGeom>
+          <a:noFill/>
+        </p:spPr>
+        <p:txBody>
+          <a:bodyPr wrap="square" anchor="t">
+            <a:spAutoFit/>
+          </a:bodyPr>
+          <a:lstStyle/>
+          <a:p>
+            <a:pPr algn="l">
+              <a:lnSpc>
                 <a:spcPct val="100000"/>
               </a:lnSpc>
               <a:spcAft>
@@ -13918,13 +14200,13 @@
               </a:spcAft>
             </a:pPr>
             <a:r>
-              <a:rPr sz="1800" b="0" i="0">
-                <a:solidFill>
-                  <a:srgbClr val="DDEEFF"/>
-                </a:solidFill>
-                <a:latin typeface="Calibri"/>
-              </a:rPr>
-              <a:t>Buyer power over workers: monopsony is the mirror image of monopoly.</a:t>
+              <a:rPr sz="1000" b="0" i="0">
+                <a:solidFill>
+                  <a:srgbClr val="555555"/>
+                </a:solidFill>
+                <a:latin typeface="Calibri"/>
+              </a:rPr>
+              <a:t>Day 2 · Conduct</a:t>
             </a:r>
           </a:p>
         </p:txBody>
@@ -14292,21 +14574,149 @@
                 </a:solidFill>
                 <a:latin typeface="Calibri"/>
               </a:rPr>
-              <a:t>Employer market power — the spectrum</a:t>
-            </a:r>
-          </a:p>
-        </p:txBody>
-      </p:sp>
-      <p:sp>
-        <p:nvSpPr>
-          <p:cNvPr id="4" name="TextBox 3"/>
-          <p:cNvSpPr txBox="1"/>
+              <a:t>US v. Microsoft — findings, remedy, legacy</a:t>
+            </a:r>
+          </a:p>
+        </p:txBody>
+      </p:sp>
+      <p:sp>
+        <p:nvSpPr>
+          <p:cNvPr id="4" name="Rectangle 3"/>
+          <p:cNvSpPr/>
           <p:nvPr/>
         </p:nvSpPr>
         <p:spPr>
           <a:xfrm>
             <a:off x="548640" y="1188720"/>
-            <a:ext cx="11064240" cy="5029200"/>
+            <a:ext cx="1463040" cy="457200"/>
+          </a:xfrm>
+          <a:prstGeom prst="rect">
+            <a:avLst/>
+          </a:prstGeom>
+          <a:solidFill>
+            <a:srgbClr val="0072B2"/>
+          </a:solidFill>
+          <a:ln>
+            <a:noFill/>
+          </a:ln>
+          <a:effectLst/>
+        </p:spPr>
+        <p:style>
+          <a:lnRef idx="1">
+            <a:schemeClr val="accent1"/>
+          </a:lnRef>
+          <a:fillRef idx="3">
+            <a:schemeClr val="accent1"/>
+          </a:fillRef>
+          <a:effectRef idx="2">
+            <a:schemeClr val="accent1"/>
+          </a:effectRef>
+          <a:fontRef idx="minor">
+            <a:schemeClr val="lt1"/>
+          </a:fontRef>
+        </p:style>
+        <p:txBody>
+          <a:bodyPr rtlCol="0" anchor="ctr"/>
+          <a:lstStyle/>
+          <a:p>
+            <a:pPr algn="ctr"/>
+          </a:p>
+        </p:txBody>
+      </p:sp>
+      <p:sp>
+        <p:nvSpPr>
+          <p:cNvPr id="5" name="TextBox 4"/>
+          <p:cNvSpPr txBox="1"/>
+          <p:nvPr/>
+        </p:nvSpPr>
+        <p:spPr>
+          <a:xfrm>
+            <a:off x="548640" y="1207008"/>
+            <a:ext cx="1463040" cy="420624"/>
+          </a:xfrm>
+          <a:prstGeom prst="rect">
+            <a:avLst/>
+          </a:prstGeom>
+          <a:noFill/>
+        </p:spPr>
+        <p:txBody>
+          <a:bodyPr wrap="square" anchor="ctr">
+            <a:spAutoFit/>
+          </a:bodyPr>
+          <a:lstStyle/>
+          <a:p>
+            <a:pPr algn="ctr">
+              <a:lnSpc>
+                <a:spcPct val="100000"/>
+              </a:lnSpc>
+              <a:spcAft>
+                <a:spcPts val="600"/>
+              </a:spcAft>
+            </a:pPr>
+            <a:r>
+              <a:rPr sz="1800" b="1" i="0">
+                <a:solidFill>
+                  <a:srgbClr val="FFFFFF"/>
+                </a:solidFill>
+                <a:latin typeface="Calibri"/>
+              </a:rPr>
+              <a:t>US</a:t>
+            </a:r>
+          </a:p>
+        </p:txBody>
+      </p:sp>
+      <p:sp>
+        <p:nvSpPr>
+          <p:cNvPr id="6" name="TextBox 5"/>
+          <p:cNvSpPr txBox="1"/>
+          <p:nvPr/>
+        </p:nvSpPr>
+        <p:spPr>
+          <a:xfrm>
+            <a:off x="2194560" y="1188720"/>
+            <a:ext cx="9418320" cy="548640"/>
+          </a:xfrm>
+          <a:prstGeom prst="rect">
+            <a:avLst/>
+          </a:prstGeom>
+          <a:noFill/>
+        </p:spPr>
+        <p:txBody>
+          <a:bodyPr wrap="square" anchor="ctr">
+            <a:spAutoFit/>
+          </a:bodyPr>
+          <a:lstStyle/>
+          <a:p>
+            <a:pPr algn="l">
+              <a:lnSpc>
+                <a:spcPct val="100000"/>
+              </a:lnSpc>
+              <a:spcAft>
+                <a:spcPts val="600"/>
+              </a:spcAft>
+            </a:pPr>
+            <a:r>
+              <a:rPr sz="1800" b="1" i="0">
+                <a:solidFill>
+                  <a:srgbClr val="0072B2"/>
+                </a:solidFill>
+                <a:latin typeface="Calibri"/>
+              </a:rPr>
+              <a:t>A won §2 case that ended in a behavioural remedy</a:t>
+            </a:r>
+          </a:p>
+        </p:txBody>
+      </p:sp>
+      <p:sp>
+        <p:nvSpPr>
+          <p:cNvPr id="7" name="TextBox 6"/>
+          <p:cNvSpPr txBox="1"/>
+          <p:nvPr/>
+        </p:nvSpPr>
+        <p:spPr>
+          <a:xfrm>
+            <a:off x="548640" y="1920240"/>
+            <a:ext cx="11064240" cy="3108960"/>
           </a:xfrm>
           <a:prstGeom prst="rect">
             <a:avLst/>
@@ -14321,103 +14731,200 @@
           <a:p>
             <a:pPr algn="l">
               <a:lnSpc>
-                <a:spcPct val="105000"/>
-              </a:lnSpc>
-              <a:spcAft>
-                <a:spcPts val="900"/>
-              </a:spcAft>
-            </a:pPr>
-            <a:r>
-              <a:rPr sz="2000" b="0" i="0">
+                <a:spcPct val="104000"/>
+              </a:lnSpc>
+              <a:spcAft>
+                <a:spcPts val="700"/>
+              </a:spcAft>
+            </a:pPr>
+            <a:r>
+              <a:rPr sz="1500" b="1" i="0">
+                <a:solidFill>
+                  <a:srgbClr val="555555"/>
+                </a:solidFill>
+                <a:latin typeface="Calibri"/>
+              </a:rPr>
+              <a:t>Facts &amp; analysis</a:t>
+            </a:r>
+          </a:p>
+          <a:p>
+            <a:pPr algn="l">
+              <a:lnSpc>
+                <a:spcPct val="104000"/>
+              </a:lnSpc>
+              <a:spcAft>
+                <a:spcPts val="700"/>
+              </a:spcAft>
+            </a:pPr>
+            <a:r>
+              <a:rPr sz="1600" b="0" i="0">
                 <a:solidFill>
                   <a:srgbClr val="222222"/>
                 </a:solidFill>
                 <a:latin typeface="Calibri"/>
               </a:rPr>
-              <a:t>•  Competitive — many employers; a worker who quits is instantly rehired at the same wage; firms are wage-takers.</a:t>
-            </a:r>
-          </a:p>
-          <a:p>
-            <a:pPr algn="l">
-              <a:lnSpc>
-                <a:spcPct val="105000"/>
-              </a:lnSpc>
-              <a:spcAft>
-                <a:spcPts val="900"/>
-              </a:spcAft>
-            </a:pPr>
-            <a:r>
-              <a:rPr sz="2000" b="0" i="0">
+              <a:t>•  Findings of fact (Jackson J., Nov 1999): monopoly power established; exclusionary conduct harmed consumers, degraded quality, stifled innovation.</a:t>
+            </a:r>
+          </a:p>
+          <a:p>
+            <a:pPr algn="l">
+              <a:lnSpc>
+                <a:spcPct val="104000"/>
+              </a:lnSpc>
+              <a:spcAft>
+                <a:spcPts val="700"/>
+              </a:spcAft>
+            </a:pPr>
+            <a:r>
+              <a:rPr sz="1600" b="0" i="0">
                 <a:solidFill>
                   <a:srgbClr val="222222"/>
                 </a:solidFill>
                 <a:latin typeface="Calibri"/>
               </a:rPr>
-              <a:t>•  Oligopsony — a few large employers in a local market; some wage-setting power, strategic interaction.</a:t>
-            </a:r>
-          </a:p>
-          <a:p>
-            <a:pPr algn="l">
-              <a:lnSpc>
-                <a:spcPct val="105000"/>
-              </a:lnSpc>
-              <a:spcAft>
-                <a:spcPts val="900"/>
-              </a:spcAft>
-            </a:pPr>
-            <a:r>
-              <a:rPr sz="2000" b="0" i="0">
+              <a:t>•  Remedy whiplash: a 2000 order to break Microsoft in two (OS vs. applications) was reversed on appeal (D.C. Cir. 2001) — which also vacated the tying ruling but upheld §2 maintenance — and remanded.</a:t>
+            </a:r>
+          </a:p>
+          <a:p>
+            <a:pPr algn="l">
+              <a:lnSpc>
+                <a:spcPct val="104000"/>
+              </a:lnSpc>
+              <a:spcAft>
+                <a:spcPts val="700"/>
+              </a:spcAft>
+            </a:pPr>
+            <a:r>
+              <a:rPr sz="1600" b="0" i="0">
                 <a:solidFill>
                   <a:srgbClr val="222222"/>
                 </a:solidFill>
                 <a:latin typeface="Calibri"/>
               </a:rPr>
-              <a:t>•  Monopsony — a dominant buyer of labour faces the whole upward-sloping supply curve and sets the wage.</a:t>
-            </a:r>
-          </a:p>
-          <a:p>
-            <a:pPr algn="l">
-              <a:lnSpc>
-                <a:spcPct val="105000"/>
-              </a:lnSpc>
-              <a:spcAft>
-                <a:spcPts val="900"/>
-              </a:spcAft>
-            </a:pPr>
-            <a:r>
-              <a:rPr sz="2000" b="0" i="0">
+              <a:t>•  2001 settlement: behavioural only (API disclosure, OEM freedom, uniform licensing, anti-retaliation; 10-year consent decree).</a:t>
+            </a:r>
+          </a:p>
+          <a:p>
+            <a:pPr algn="l">
+              <a:lnSpc>
+                <a:spcPct val="104000"/>
+              </a:lnSpc>
+              <a:spcAft>
+                <a:spcPts val="700"/>
+              </a:spcAft>
+            </a:pPr>
+            <a:r>
+              <a:rPr sz="1600" b="0" i="0">
                 <a:solidFill>
                   <a:srgbClr val="222222"/>
                 </a:solidFill>
                 <a:latin typeface="Calibri"/>
               </a:rPr>
-              <a:t>•  The mirror of product-market power: monopoly raises price by restricting output; monopsony lowers the wage by restricting hiring.</a:t>
-            </a:r>
-          </a:p>
-          <a:p>
-            <a:pPr algn="l">
-              <a:lnSpc>
-                <a:spcPct val="105000"/>
-              </a:lnSpc>
-              <a:spcAft>
-                <a:spcPts val="900"/>
-              </a:spcAft>
-            </a:pPr>
-            <a:r>
-              <a:rPr sz="2000" b="0" i="0">
+              <a:t>•  Legacy: the structural-vs-behavioural remedy debate; the line from Microsoft to Google (search/ad-tech) to Apple/Amazon app-store and self-preferencing.</a:t>
+            </a:r>
+          </a:p>
+        </p:txBody>
+      </p:sp>
+      <p:sp>
+        <p:nvSpPr>
+          <p:cNvPr id="8" name="Rectangle 7"/>
+          <p:cNvSpPr/>
+          <p:nvPr/>
+        </p:nvSpPr>
+        <p:spPr>
+          <a:xfrm>
+            <a:off x="548640" y="5212080"/>
+            <a:ext cx="11064240" cy="1005840"/>
+          </a:xfrm>
+          <a:prstGeom prst="rect">
+            <a:avLst/>
+          </a:prstGeom>
+          <a:solidFill>
+            <a:srgbClr val="F2F2F2"/>
+          </a:solidFill>
+          <a:ln w="12700">
+            <a:solidFill>
+              <a:srgbClr val="0072B2"/>
+            </a:solidFill>
+          </a:ln>
+          <a:effectLst/>
+        </p:spPr>
+        <p:style>
+          <a:lnRef idx="1">
+            <a:schemeClr val="accent1"/>
+          </a:lnRef>
+          <a:fillRef idx="3">
+            <a:schemeClr val="accent1"/>
+          </a:fillRef>
+          <a:effectRef idx="2">
+            <a:schemeClr val="accent1"/>
+          </a:effectRef>
+          <a:fontRef idx="minor">
+            <a:schemeClr val="lt1"/>
+          </a:fontRef>
+        </p:style>
+        <p:txBody>
+          <a:bodyPr rtlCol="0" anchor="ctr"/>
+          <a:lstStyle/>
+          <a:p>
+            <a:pPr algn="ctr"/>
+          </a:p>
+        </p:txBody>
+      </p:sp>
+      <p:sp>
+        <p:nvSpPr>
+          <p:cNvPr id="9" name="TextBox 8"/>
+          <p:cNvSpPr txBox="1"/>
+          <p:nvPr/>
+        </p:nvSpPr>
+        <p:spPr>
+          <a:xfrm>
+            <a:off x="731520" y="5303520"/>
+            <a:ext cx="10698480" cy="868680"/>
+          </a:xfrm>
+          <a:prstGeom prst="rect">
+            <a:avLst/>
+          </a:prstGeom>
+          <a:noFill/>
+        </p:spPr>
+        <p:txBody>
+          <a:bodyPr wrap="square" anchor="ctr">
+            <a:spAutoFit/>
+          </a:bodyPr>
+          <a:lstStyle/>
+          <a:p>
+            <a:pPr algn="l">
+              <a:lnSpc>
+                <a:spcPct val="103000"/>
+              </a:lnSpc>
+              <a:spcAft>
+                <a:spcPts val="600"/>
+              </a:spcAft>
+            </a:pPr>
+            <a:r>
+              <a:rPr sz="1600" b="1" i="0">
+                <a:solidFill>
+                  <a:srgbClr val="0072B2"/>
+                </a:solidFill>
+                <a:latin typeface="Calibri"/>
+              </a:rPr>
+              <a:t>Why it matters:  </a:t>
+            </a:r>
+            <a:r>
+              <a:rPr sz="1600" b="0" i="0">
                 <a:solidFill>
                   <a:srgbClr val="222222"/>
                 </a:solidFill>
                 <a:latin typeface="Calibri"/>
               </a:rPr>
-              <a:t>•  Geography is decisive: labour markets are local and occupation-specific, so power concentrates far more than product-market shares suggest.</a:t>
-            </a:r>
-          </a:p>
-        </p:txBody>
-      </p:sp>
-      <p:sp>
-        <p:nvSpPr>
-          <p:cNvPr id="5" name="TextBox 4"/>
+              <a:t>Even a won §2 case can end in a behavioural remedy a court can administer — and the appellate record, not the headline, is what you cite.</a:t>
+            </a:r>
+          </a:p>
+        </p:txBody>
+      </p:sp>
+      <p:sp>
+        <p:nvSpPr>
+          <p:cNvPr id="10" name="TextBox 9"/>
           <p:cNvSpPr txBox="1"/>
           <p:nvPr/>
         </p:nvSpPr>
@@ -14484,13 +14991,13 @@
         <p:spPr>
           <a:xfrm>
             <a:off x="0" y="0"/>
-            <a:ext cx="12191695" cy="960120"/>
+            <a:ext cx="12191695" cy="6858000"/>
           </a:xfrm>
           <a:prstGeom prst="rect">
             <a:avLst/>
           </a:prstGeom>
           <a:solidFill>
-            <a:srgbClr val="E69F00"/>
+            <a:srgbClr val="0072B2"/>
           </a:solidFill>
           <a:ln>
             <a:noFill/>
@@ -14521,109 +15028,23 @@
       </p:sp>
       <p:sp>
         <p:nvSpPr>
-          <p:cNvPr id="3" name="TextBox 2"/>
-          <p:cNvSpPr txBox="1"/>
-          <p:nvPr/>
-        </p:nvSpPr>
-        <p:spPr>
-          <a:xfrm>
-            <a:off x="457200" y="109728"/>
-            <a:ext cx="11247120" cy="731520"/>
-          </a:xfrm>
-          <a:prstGeom prst="rect">
-            <a:avLst/>
-          </a:prstGeom>
-          <a:noFill/>
-        </p:spPr>
-        <p:txBody>
-          <a:bodyPr wrap="square" anchor="ctr">
-            <a:spAutoFit/>
-          </a:bodyPr>
-          <a:lstStyle/>
-          <a:p>
-            <a:pPr algn="l">
-              <a:lnSpc>
-                <a:spcPct val="100000"/>
-              </a:lnSpc>
-              <a:spcAft>
-                <a:spcPts val="600"/>
-              </a:spcAft>
-            </a:pPr>
-            <a:r>
-              <a:rPr sz="2800" b="1" i="0">
-                <a:solidFill>
-                  <a:srgbClr val="FFFFFF"/>
-                </a:solidFill>
-                <a:latin typeface="Calibri"/>
-              </a:rPr>
-              <a:t>Monopsony and the wage markdown</a:t>
-            </a:r>
-          </a:p>
-        </p:txBody>
-      </p:sp>
-      <p:sp>
-        <p:nvSpPr>
-          <p:cNvPr id="4" name="TextBox 3"/>
-          <p:cNvSpPr txBox="1"/>
-          <p:nvPr/>
-        </p:nvSpPr>
-        <p:spPr>
-          <a:xfrm>
-            <a:off x="548640" y="1188720"/>
-            <a:ext cx="11064240" cy="822960"/>
-          </a:xfrm>
-          <a:prstGeom prst="rect">
-            <a:avLst/>
-          </a:prstGeom>
-          <a:noFill/>
-        </p:spPr>
-        <p:txBody>
-          <a:bodyPr wrap="square" anchor="t">
-            <a:spAutoFit/>
-          </a:bodyPr>
-          <a:lstStyle/>
-          <a:p>
-            <a:pPr algn="l">
-              <a:lnSpc>
-                <a:spcPct val="105000"/>
-              </a:lnSpc>
-              <a:spcAft>
-                <a:spcPts val="600"/>
-              </a:spcAft>
-            </a:pPr>
-            <a:r>
-              <a:rPr sz="1800" b="0" i="0">
-                <a:solidFill>
-                  <a:srgbClr val="222222"/>
-                </a:solidFill>
-                <a:latin typeface="Calibri"/>
-              </a:rPr>
-              <a:t>A dominant employer faces an upward-sloping labour supply curve, so it holds wages below the value workers add:</a:t>
-            </a:r>
-          </a:p>
-        </p:txBody>
-      </p:sp>
-      <p:sp>
-        <p:nvSpPr>
-          <p:cNvPr id="5" name="Rectangle 4"/>
+          <p:cNvPr id="3" name="Rectangle 2"/>
           <p:cNvSpPr/>
           <p:nvPr/>
         </p:nvSpPr>
         <p:spPr>
           <a:xfrm>
-            <a:off x="1097280" y="2240280"/>
-            <a:ext cx="9966960" cy="1371600"/>
+            <a:off x="731520" y="3200400"/>
+            <a:ext cx="3657600" cy="54864"/>
           </a:xfrm>
           <a:prstGeom prst="rect">
             <a:avLst/>
           </a:prstGeom>
           <a:solidFill>
-            <a:srgbClr val="F2F2F2"/>
+            <a:srgbClr val="FFFFFF"/>
           </a:solidFill>
-          <a:ln w="12700">
-            <a:solidFill>
-              <a:srgbClr val="E69F00"/>
-            </a:solidFill>
+          <a:ln>
+            <a:noFill/>
           </a:ln>
           <a:effectLst/>
         </p:spPr>
@@ -14651,202 +15072,84 @@
       </p:sp>
       <p:sp>
         <p:nvSpPr>
-          <p:cNvPr id="6" name="TextBox 5"/>
-          <p:cNvSpPr txBox="1"/>
-          <p:nvPr/>
-        </p:nvSpPr>
-        <p:spPr>
-          <a:xfrm>
-            <a:off x="1280160" y="2377440"/>
-            <a:ext cx="9601200" cy="1097280"/>
-          </a:xfrm>
-          <a:prstGeom prst="rect">
-            <a:avLst/>
-          </a:prstGeom>
-          <a:noFill/>
-        </p:spPr>
-        <p:txBody>
-          <a:bodyPr wrap="square" anchor="ctr">
-            <a:spAutoFit/>
-          </a:bodyPr>
-          <a:lstStyle/>
-          <a:p>
-            <a:pPr algn="ctr">
-              <a:lnSpc>
-                <a:spcPct val="110000"/>
+          <p:cNvPr id="4" name="TextBox 3"/>
+          <p:cNvSpPr txBox="1"/>
+          <p:nvPr/>
+        </p:nvSpPr>
+        <p:spPr>
+          <a:xfrm>
+            <a:off x="731520" y="2194560"/>
+            <a:ext cx="10698480" cy="1371600"/>
+          </a:xfrm>
+          <a:prstGeom prst="rect">
+            <a:avLst/>
+          </a:prstGeom>
+          <a:noFill/>
+        </p:spPr>
+        <p:txBody>
+          <a:bodyPr wrap="square" anchor="b">
+            <a:spAutoFit/>
+          </a:bodyPr>
+          <a:lstStyle/>
+          <a:p>
+            <a:pPr algn="l">
+              <a:lnSpc>
+                <a:spcPct val="100000"/>
               </a:lnSpc>
               <a:spcAft>
                 <a:spcPts val="600"/>
               </a:spcAft>
             </a:pPr>
             <a:r>
-              <a:rPr sz="2400" b="1" i="0">
-                <a:solidFill>
-                  <a:srgbClr val="0072B2"/>
-                </a:solidFill>
-                <a:latin typeface="Consolas"/>
-              </a:rPr>
-              <a:t>wage / MRPL = η / (1 + η)</a:t>
-            </a:r>
-          </a:p>
-          <a:p>
-            <a:pPr algn="ctr">
-              <a:lnSpc>
-                <a:spcPct val="110000"/>
+              <a:rPr sz="3400" b="1" i="0">
+                <a:solidFill>
+                  <a:srgbClr val="FFFFFF"/>
+                </a:solidFill>
+                <a:latin typeface="Calibri"/>
+              </a:rPr>
+              <a:t>Module 2.4 — Antitrust and labour markets</a:t>
+            </a:r>
+          </a:p>
+        </p:txBody>
+      </p:sp>
+      <p:sp>
+        <p:nvSpPr>
+          <p:cNvPr id="5" name="TextBox 4"/>
+          <p:cNvSpPr txBox="1"/>
+          <p:nvPr/>
+        </p:nvSpPr>
+        <p:spPr>
+          <a:xfrm>
+            <a:off x="731520" y="3383280"/>
+            <a:ext cx="10698480" cy="1097280"/>
+          </a:xfrm>
+          <a:prstGeom prst="rect">
+            <a:avLst/>
+          </a:prstGeom>
+          <a:noFill/>
+        </p:spPr>
+        <p:txBody>
+          <a:bodyPr wrap="square" anchor="t">
+            <a:spAutoFit/>
+          </a:bodyPr>
+          <a:lstStyle/>
+          <a:p>
+            <a:pPr algn="l">
+              <a:lnSpc>
+                <a:spcPct val="100000"/>
               </a:lnSpc>
               <a:spcAft>
                 <a:spcPts val="600"/>
               </a:spcAft>
             </a:pPr>
             <a:r>
-              <a:rPr sz="2400" b="1" i="0">
-                <a:solidFill>
-                  <a:srgbClr val="0072B2"/>
-                </a:solidFill>
-                <a:latin typeface="Consolas"/>
-              </a:rPr>
-              <a:t>η = firm-level labour-supply elasticity</a:t>
-            </a:r>
-          </a:p>
-        </p:txBody>
-      </p:sp>
-      <p:sp>
-        <p:nvSpPr>
-          <p:cNvPr id="7" name="TextBox 6"/>
-          <p:cNvSpPr txBox="1"/>
-          <p:nvPr/>
-        </p:nvSpPr>
-        <p:spPr>
-          <a:xfrm>
-            <a:off x="548640" y="3931920"/>
-            <a:ext cx="11064240" cy="2194560"/>
-          </a:xfrm>
-          <a:prstGeom prst="rect">
-            <a:avLst/>
-          </a:prstGeom>
-          <a:noFill/>
-        </p:spPr>
-        <p:txBody>
-          <a:bodyPr wrap="square" anchor="t">
-            <a:spAutoFit/>
-          </a:bodyPr>
-          <a:lstStyle/>
-          <a:p>
-            <a:pPr algn="l">
-              <a:lnSpc>
-                <a:spcPct val="105000"/>
-              </a:lnSpc>
-              <a:spcAft>
-                <a:spcPts val="800"/>
-              </a:spcAft>
-            </a:pPr>
-            <a:r>
-              <a:rPr sz="1700" b="0" i="0">
-                <a:solidFill>
-                  <a:srgbClr val="222222"/>
-                </a:solidFill>
-                <a:latin typeface="Calibri"/>
-              </a:rPr>
-              <a:t>•  MRPL = marginal revenue product of labour (what the worker adds).</a:t>
-            </a:r>
-          </a:p>
-          <a:p>
-            <a:pPr algn="l">
-              <a:lnSpc>
-                <a:spcPct val="105000"/>
-              </a:lnSpc>
-              <a:spcAft>
-                <a:spcPts val="800"/>
-              </a:spcAft>
-            </a:pPr>
-            <a:r>
-              <a:rPr sz="1700" b="0" i="0">
-                <a:solidFill>
-                  <a:srgbClr val="222222"/>
-                </a:solidFill>
-                <a:latin typeface="Calibri"/>
-              </a:rPr>
-              <a:t>•  η = 2 → wage = 2/3 of MRPL → a 33% markdown. As η → ∞ (competitive), wage → MRPL.</a:t>
-            </a:r>
-          </a:p>
-          <a:p>
-            <a:pPr algn="l">
-              <a:lnSpc>
-                <a:spcPct val="105000"/>
-              </a:lnSpc>
-              <a:spcAft>
-                <a:spcPts val="800"/>
-              </a:spcAft>
-            </a:pPr>
-            <a:r>
-              <a:rPr sz="1700" b="0" i="0">
-                <a:solidFill>
-                  <a:srgbClr val="222222"/>
-                </a:solidFill>
-                <a:latin typeface="Calibri"/>
-              </a:rPr>
-              <a:t>•  A firm can be tiny in its product market yet dominant as a BUYER of local labour — the only large hospital in a rural commuting zone.</a:t>
-            </a:r>
-          </a:p>
-          <a:p>
-            <a:pPr algn="l">
-              <a:lnSpc>
-                <a:spcPct val="105000"/>
-              </a:lnSpc>
-              <a:spcAft>
-                <a:spcPts val="800"/>
-              </a:spcAft>
-            </a:pPr>
-            <a:r>
-              <a:rPr sz="1700" b="0" i="0">
-                <a:solidFill>
-                  <a:srgbClr val="222222"/>
-                </a:solidFill>
-                <a:latin typeface="Calibri"/>
-              </a:rPr>
-              <a:t>•  The markdown is the labour analogue of the Lerner index (Day 1): less elastic supply =&gt; bigger wedge.</a:t>
-            </a:r>
-          </a:p>
-        </p:txBody>
-      </p:sp>
-      <p:sp>
-        <p:nvSpPr>
-          <p:cNvPr id="8" name="TextBox 7"/>
-          <p:cNvSpPr txBox="1"/>
-          <p:nvPr/>
-        </p:nvSpPr>
-        <p:spPr>
-          <a:xfrm>
-            <a:off x="457200" y="6446520"/>
-            <a:ext cx="11247120" cy="320040"/>
-          </a:xfrm>
-          <a:prstGeom prst="rect">
-            <a:avLst/>
-          </a:prstGeom>
-          <a:noFill/>
-        </p:spPr>
-        <p:txBody>
-          <a:bodyPr wrap="square" anchor="t">
-            <a:spAutoFit/>
-          </a:bodyPr>
-          <a:lstStyle/>
-          <a:p>
-            <a:pPr algn="l">
-              <a:lnSpc>
-                <a:spcPct val="100000"/>
-              </a:lnSpc>
-              <a:spcAft>
-                <a:spcPts val="600"/>
-              </a:spcAft>
-            </a:pPr>
-            <a:r>
-              <a:rPr sz="1000" b="0" i="0">
-                <a:solidFill>
-                  <a:srgbClr val="555555"/>
-                </a:solidFill>
-                <a:latin typeface="Calibri"/>
-              </a:rPr>
-              <a:t>Day 2 · Conduct</a:t>
+              <a:rPr sz="1800" b="0" i="0">
+                <a:solidFill>
+                  <a:srgbClr val="DDEEFF"/>
+                </a:solidFill>
+                <a:latin typeface="Calibri"/>
+              </a:rPr>
+              <a:t>Buyer power over workers: monopsony is the mirror image of monopoly.</a:t>
             </a:r>
           </a:p>
         </p:txBody>
@@ -14884,7 +15187,7 @@
             <a:avLst/>
           </a:prstGeom>
           <a:solidFill>
-            <a:srgbClr val="E69F00"/>
+            <a:srgbClr val="0072B2"/>
           </a:solidFill>
           <a:ln>
             <a:noFill/>
@@ -14950,7 +15253,7 @@
                 </a:solidFill>
                 <a:latin typeface="Calibri"/>
               </a:rPr>
-              <a:t>Labour-market concentration (labour HHI)</a:t>
+              <a:t>Employer market power — the spectrum</a:t>
             </a:r>
           </a:p>
         </p:txBody>
@@ -14964,7 +15267,7 @@
         <p:spPr>
           <a:xfrm>
             <a:off x="548640" y="1188720"/>
-            <a:ext cx="11064240" cy="822960"/>
+            <a:ext cx="11064240" cy="5029200"/>
           </a:xfrm>
           <a:prstGeom prst="rect">
             <a:avLst/>
@@ -14982,147 +15285,36 @@
                 <a:spcPct val="105000"/>
               </a:lnSpc>
               <a:spcAft>
-                <a:spcPts val="600"/>
-              </a:spcAft>
-            </a:pPr>
-            <a:r>
-              <a:rPr sz="1800" b="0" i="0">
+                <a:spcPts val="900"/>
+              </a:spcAft>
+            </a:pPr>
+            <a:r>
+              <a:rPr sz="2000" b="0" i="0">
                 <a:solidFill>
                   <a:srgbClr val="222222"/>
                 </a:solidFill>
                 <a:latin typeface="Calibri"/>
               </a:rPr>
-              <a:t>Define the market as occupation × commuting zone, then apply the same HHI:</a:t>
-            </a:r>
-          </a:p>
-        </p:txBody>
-      </p:sp>
-      <p:sp>
-        <p:nvSpPr>
-          <p:cNvPr id="5" name="Rectangle 4"/>
-          <p:cNvSpPr/>
-          <p:nvPr/>
-        </p:nvSpPr>
-        <p:spPr>
-          <a:xfrm>
-            <a:off x="1097280" y="2240280"/>
-            <a:ext cx="9966960" cy="1371600"/>
-          </a:xfrm>
-          <a:prstGeom prst="rect">
-            <a:avLst/>
-          </a:prstGeom>
-          <a:solidFill>
-            <a:srgbClr val="F2F2F2"/>
-          </a:solidFill>
-          <a:ln w="12700">
-            <a:solidFill>
-              <a:srgbClr val="E69F00"/>
-            </a:solidFill>
-          </a:ln>
-          <a:effectLst/>
-        </p:spPr>
-        <p:style>
-          <a:lnRef idx="1">
-            <a:schemeClr val="accent1"/>
-          </a:lnRef>
-          <a:fillRef idx="3">
-            <a:schemeClr val="accent1"/>
-          </a:fillRef>
-          <a:effectRef idx="2">
-            <a:schemeClr val="accent1"/>
-          </a:effectRef>
-          <a:fontRef idx="minor">
-            <a:schemeClr val="lt1"/>
-          </a:fontRef>
-        </p:style>
-        <p:txBody>
-          <a:bodyPr rtlCol="0" anchor="ctr"/>
-          <a:lstStyle/>
-          <a:p>
-            <a:pPr algn="ctr"/>
-          </a:p>
-        </p:txBody>
-      </p:sp>
-      <p:sp>
-        <p:nvSpPr>
-          <p:cNvPr id="6" name="TextBox 5"/>
-          <p:cNvSpPr txBox="1"/>
-          <p:nvPr/>
-        </p:nvSpPr>
-        <p:spPr>
-          <a:xfrm>
-            <a:off x="1280160" y="2377440"/>
-            <a:ext cx="9601200" cy="1097280"/>
-          </a:xfrm>
-          <a:prstGeom prst="rect">
-            <a:avLst/>
-          </a:prstGeom>
-          <a:noFill/>
-        </p:spPr>
-        <p:txBody>
-          <a:bodyPr wrap="square" anchor="ctr">
-            <a:spAutoFit/>
-          </a:bodyPr>
-          <a:lstStyle/>
-          <a:p>
-            <a:pPr algn="ctr">
-              <a:lnSpc>
-                <a:spcPct val="110000"/>
-              </a:lnSpc>
-              <a:spcAft>
-                <a:spcPts val="600"/>
-              </a:spcAft>
-            </a:pPr>
-            <a:r>
-              <a:rPr sz="2400" b="1" i="0">
-                <a:solidFill>
-                  <a:srgbClr val="0072B2"/>
-                </a:solidFill>
-                <a:latin typeface="Consolas"/>
-              </a:rPr>
-              <a:t>Labour HHI = Σ (employment share_i)²</a:t>
-            </a:r>
-          </a:p>
-        </p:txBody>
-      </p:sp>
-      <p:sp>
-        <p:nvSpPr>
-          <p:cNvPr id="7" name="TextBox 6"/>
-          <p:cNvSpPr txBox="1"/>
-          <p:nvPr/>
-        </p:nvSpPr>
-        <p:spPr>
-          <a:xfrm>
-            <a:off x="548640" y="3931920"/>
-            <a:ext cx="11064240" cy="2194560"/>
-          </a:xfrm>
-          <a:prstGeom prst="rect">
-            <a:avLst/>
-          </a:prstGeom>
-          <a:noFill/>
-        </p:spPr>
-        <p:txBody>
-          <a:bodyPr wrap="square" anchor="t">
-            <a:spAutoFit/>
-          </a:bodyPr>
-          <a:lstStyle/>
+              <a:t>•  Competitive — many employers; a worker who quits is instantly rehired at the same wage; firms are wage-takers.</a:t>
+            </a:r>
+          </a:p>
           <a:p>
             <a:pPr algn="l">
               <a:lnSpc>
                 <a:spcPct val="105000"/>
               </a:lnSpc>
               <a:spcAft>
-                <a:spcPts val="800"/>
-              </a:spcAft>
-            </a:pPr>
-            <a:r>
-              <a:rPr sz="1700" b="0" i="0">
+                <a:spcPts val="900"/>
+              </a:spcAft>
+            </a:pPr>
+            <a:r>
+              <a:rPr sz="2000" b="0" i="0">
                 <a:solidFill>
                   <a:srgbClr val="222222"/>
                 </a:solidFill>
                 <a:latin typeface="Calibri"/>
               </a:rPr>
-              <a:t>•  2023 Merger Guidelines flag concentration at HHI 1,800 (the 2010 figure was 2,500).</a:t>
+              <a:t>•  Oligopsony — a few large employers in a local market; some wage-setting power, strategic interaction.</a:t>
             </a:r>
           </a:p>
           <a:p>
@@ -15131,17 +15323,17 @@
                 <a:spcPct val="105000"/>
               </a:lnSpc>
               <a:spcAft>
-                <a:spcPts val="800"/>
-              </a:spcAft>
-            </a:pPr>
-            <a:r>
-              <a:rPr sz="1700" b="0" i="0">
+                <a:spcPts val="900"/>
+              </a:spcAft>
+            </a:pPr>
+            <a:r>
+              <a:rPr sz="2000" b="0" i="0">
                 <a:solidFill>
                   <a:srgbClr val="222222"/>
                 </a:solidFill>
                 <a:latin typeface="Calibri"/>
               </a:rPr>
-              <a:t>•  Many US local labour markets exceed 3,000 — highly concentrated (Azar–Marinescu–Steinbaum).</a:t>
+              <a:t>•  Monopsony — a dominant buyer of labour faces the whole upward-sloping supply curve and sets the wage.</a:t>
             </a:r>
           </a:p>
           <a:p>
@@ -15150,17 +15342,17 @@
                 <a:spcPct val="105000"/>
               </a:lnSpc>
               <a:spcAft>
-                <a:spcPts val="800"/>
-              </a:spcAft>
-            </a:pPr>
-            <a:r>
-              <a:rPr sz="1700" b="0" i="0">
+                <a:spcPts val="900"/>
+              </a:spcAft>
+            </a:pPr>
+            <a:r>
+              <a:rPr sz="2000" b="0" i="0">
                 <a:solidFill>
                   <a:srgbClr val="222222"/>
                 </a:solidFill>
                 <a:latin typeface="Calibri"/>
               </a:rPr>
-              <a:t>•  Same arithmetic as product-market HHI; the work is defining the geography (commute) and the occupation correctly.</a:t>
+              <a:t>•  The mirror of product-market power: monopoly raises price by restricting output; monopsony lowers the wage by restricting hiring.</a:t>
             </a:r>
           </a:p>
           <a:p>
@@ -15169,24 +15361,24 @@
                 <a:spcPct val="105000"/>
               </a:lnSpc>
               <a:spcAft>
-                <a:spcPts val="800"/>
-              </a:spcAft>
-            </a:pPr>
-            <a:r>
-              <a:rPr sz="1700" b="0" i="0">
+                <a:spcPts val="900"/>
+              </a:spcAft>
+            </a:pPr>
+            <a:r>
+              <a:rPr sz="2000" b="0" i="0">
                 <a:solidFill>
                   <a:srgbClr val="222222"/>
                 </a:solidFill>
                 <a:latin typeface="Calibri"/>
               </a:rPr>
-              <a:t>•  A merger can be benign in the product market but anticompetitive in the labour market — review both.</a:t>
-            </a:r>
-          </a:p>
-        </p:txBody>
-      </p:sp>
-      <p:sp>
-        <p:nvSpPr>
-          <p:cNvPr id="8" name="TextBox 7"/>
+              <a:t>•  Geography is decisive: labour markets are local and occupation-specific, so power concentrates far more than product-market shares suggest.</a:t>
+            </a:r>
+          </a:p>
+        </p:txBody>
+      </p:sp>
+      <p:sp>
+        <p:nvSpPr>
+          <p:cNvPr id="5" name="TextBox 4"/>
           <p:cNvSpPr txBox="1"/>
           <p:nvPr/>
         </p:nvSpPr>
@@ -15259,7 +15451,7 @@
             <a:avLst/>
           </a:prstGeom>
           <a:solidFill>
-            <a:srgbClr val="0072B2"/>
+            <a:srgbClr val="E69F00"/>
           </a:solidFill>
           <a:ln>
             <a:noFill/>
@@ -15325,7 +15517,7 @@
                 </a:solidFill>
                 <a:latin typeface="Calibri"/>
               </a:rPr>
-              <a:t>Conduct: no-poach, wage-fixing, non-competes</a:t>
+              <a:t>Monopsony and the wage markdown</a:t>
             </a:r>
           </a:p>
         </p:txBody>
@@ -15339,7 +15531,7 @@
         <p:spPr>
           <a:xfrm>
             <a:off x="548640" y="1188720"/>
-            <a:ext cx="11064240" cy="5029200"/>
+            <a:ext cx="11064240" cy="822960"/>
           </a:xfrm>
           <a:prstGeom prst="rect">
             <a:avLst/>
@@ -15357,36 +15549,166 @@
                 <a:spcPct val="105000"/>
               </a:lnSpc>
               <a:spcAft>
-                <a:spcPts val="900"/>
-              </a:spcAft>
-            </a:pPr>
-            <a:r>
-              <a:rPr sz="2000" b="0" i="0">
+                <a:spcPts val="600"/>
+              </a:spcAft>
+            </a:pPr>
+            <a:r>
+              <a:rPr sz="1800" b="0" i="0">
                 <a:solidFill>
                   <a:srgbClr val="222222"/>
                 </a:solidFill>
                 <a:latin typeface="Calibri"/>
               </a:rPr>
-              <a:t>•  No-poach agreements between employers (incl. across franchisees) and wage-fixing — the US DOJ treats naked versions as per se criminal, like price-fixing.</a:t>
-            </a:r>
-          </a:p>
+              <a:t>A dominant employer faces an upward-sloping labour supply curve, so it holds wages below the value workers add:</a:t>
+            </a:r>
+          </a:p>
+        </p:txBody>
+      </p:sp>
+      <p:sp>
+        <p:nvSpPr>
+          <p:cNvPr id="5" name="Rectangle 4"/>
+          <p:cNvSpPr/>
+          <p:nvPr/>
+        </p:nvSpPr>
+        <p:spPr>
+          <a:xfrm>
+            <a:off x="1097280" y="2240280"/>
+            <a:ext cx="9966960" cy="1371600"/>
+          </a:xfrm>
+          <a:prstGeom prst="rect">
+            <a:avLst/>
+          </a:prstGeom>
+          <a:solidFill>
+            <a:srgbClr val="F2F2F2"/>
+          </a:solidFill>
+          <a:ln w="12700">
+            <a:solidFill>
+              <a:srgbClr val="E69F00"/>
+            </a:solidFill>
+          </a:ln>
+          <a:effectLst/>
+        </p:spPr>
+        <p:style>
+          <a:lnRef idx="1">
+            <a:schemeClr val="accent1"/>
+          </a:lnRef>
+          <a:fillRef idx="3">
+            <a:schemeClr val="accent1"/>
+          </a:fillRef>
+          <a:effectRef idx="2">
+            <a:schemeClr val="accent1"/>
+          </a:effectRef>
+          <a:fontRef idx="minor">
+            <a:schemeClr val="lt1"/>
+          </a:fontRef>
+        </p:style>
+        <p:txBody>
+          <a:bodyPr rtlCol="0" anchor="ctr"/>
+          <a:lstStyle/>
+          <a:p>
+            <a:pPr algn="ctr"/>
+          </a:p>
+        </p:txBody>
+      </p:sp>
+      <p:sp>
+        <p:nvSpPr>
+          <p:cNvPr id="6" name="TextBox 5"/>
+          <p:cNvSpPr txBox="1"/>
+          <p:nvPr/>
+        </p:nvSpPr>
+        <p:spPr>
+          <a:xfrm>
+            <a:off x="1280160" y="2377440"/>
+            <a:ext cx="9601200" cy="1097280"/>
+          </a:xfrm>
+          <a:prstGeom prst="rect">
+            <a:avLst/>
+          </a:prstGeom>
+          <a:noFill/>
+        </p:spPr>
+        <p:txBody>
+          <a:bodyPr wrap="square" anchor="ctr">
+            <a:spAutoFit/>
+          </a:bodyPr>
+          <a:lstStyle/>
+          <a:p>
+            <a:pPr algn="ctr">
+              <a:lnSpc>
+                <a:spcPct val="110000"/>
+              </a:lnSpc>
+              <a:spcAft>
+                <a:spcPts val="600"/>
+              </a:spcAft>
+            </a:pPr>
+            <a:r>
+              <a:rPr sz="2400" b="1" i="0">
+                <a:solidFill>
+                  <a:srgbClr val="0072B2"/>
+                </a:solidFill>
+                <a:latin typeface="Consolas"/>
+              </a:rPr>
+              <a:t>wage / MRPL = η / (1 + η)</a:t>
+            </a:r>
+          </a:p>
+          <a:p>
+            <a:pPr algn="ctr">
+              <a:lnSpc>
+                <a:spcPct val="110000"/>
+              </a:lnSpc>
+              <a:spcAft>
+                <a:spcPts val="600"/>
+              </a:spcAft>
+            </a:pPr>
+            <a:r>
+              <a:rPr sz="2400" b="1" i="0">
+                <a:solidFill>
+                  <a:srgbClr val="0072B2"/>
+                </a:solidFill>
+                <a:latin typeface="Consolas"/>
+              </a:rPr>
+              <a:t>η = firm-level labour-supply elasticity</a:t>
+            </a:r>
+          </a:p>
+        </p:txBody>
+      </p:sp>
+      <p:sp>
+        <p:nvSpPr>
+          <p:cNvPr id="7" name="TextBox 6"/>
+          <p:cNvSpPr txBox="1"/>
+          <p:nvPr/>
+        </p:nvSpPr>
+        <p:spPr>
+          <a:xfrm>
+            <a:off x="548640" y="3931920"/>
+            <a:ext cx="11064240" cy="2194560"/>
+          </a:xfrm>
+          <a:prstGeom prst="rect">
+            <a:avLst/>
+          </a:prstGeom>
+          <a:noFill/>
+        </p:spPr>
+        <p:txBody>
+          <a:bodyPr wrap="square" anchor="t">
+            <a:spAutoFit/>
+          </a:bodyPr>
+          <a:lstStyle/>
           <a:p>
             <a:pPr algn="l">
               <a:lnSpc>
                 <a:spcPct val="105000"/>
               </a:lnSpc>
               <a:spcAft>
-                <a:spcPts val="900"/>
-              </a:spcAft>
-            </a:pPr>
-            <a:r>
-              <a:rPr sz="2000" b="0" i="0">
+                <a:spcPts val="800"/>
+              </a:spcAft>
+            </a:pPr>
+            <a:r>
+              <a:rPr sz="1700" b="0" i="0">
                 <a:solidFill>
                   <a:srgbClr val="222222"/>
                 </a:solidFill>
                 <a:latin typeface="Calibri"/>
               </a:rPr>
-              <a:t>•  Reality check: Jindal (physical therapists) — jury ACQUITTED on the Sherman counts; DaVita — defendants ACQUITTED (2022). Hard to win criminally, but the cases reshaped compliance.</a:t>
+              <a:t>•  MRPL = marginal revenue product of labour (what the worker adds).</a:t>
             </a:r>
           </a:p>
           <a:p>
@@ -15395,17 +15717,17 @@
                 <a:spcPct val="105000"/>
               </a:lnSpc>
               <a:spcAft>
-                <a:spcPts val="900"/>
-              </a:spcAft>
-            </a:pPr>
-            <a:r>
-              <a:rPr sz="2000" b="0" i="0">
+                <a:spcPts val="800"/>
+              </a:spcAft>
+            </a:pPr>
+            <a:r>
+              <a:rPr sz="1700" b="0" i="0">
                 <a:solidFill>
                   <a:srgbClr val="222222"/>
                 </a:solidFill>
                 <a:latin typeface="Calibri"/>
               </a:rPr>
-              <a:t>•  Non-competes bind workers post-employment (~18% of US workers); they cut mobility and shave wages. The FTC's 2024 ban was SET ASIDE (Ryan v. FTC); the appeal was dropped (2025) -&gt; back to case-by-case enforcement.</a:t>
+              <a:t>•  η = 2 → wage = 2/3 of MRPL → a 33% markdown. As η → ∞ (competitive), wage → MRPL.</a:t>
             </a:r>
           </a:p>
           <a:p>
@@ -15414,24 +15736,43 @@
                 <a:spcPct val="105000"/>
               </a:lnSpc>
               <a:spcAft>
-                <a:spcPts val="900"/>
-              </a:spcAft>
-            </a:pPr>
-            <a:r>
-              <a:rPr sz="2000" b="0" i="0">
+                <a:spcPts val="800"/>
+              </a:spcAft>
+            </a:pPr>
+            <a:r>
+              <a:rPr sz="1700" b="0" i="0">
                 <a:solidFill>
                   <a:srgbClr val="222222"/>
                 </a:solidFill>
                 <a:latin typeface="Calibri"/>
               </a:rPr>
-              <a:t>•  Information sharing on pay (benchmarking surveys, algorithms) can facilitate coordination short of an explicit agreement.</a:t>
-            </a:r>
-          </a:p>
-        </p:txBody>
-      </p:sp>
-      <p:sp>
-        <p:nvSpPr>
-          <p:cNvPr id="5" name="TextBox 4"/>
+              <a:t>•  A firm can be tiny in its product market yet dominant as a BUYER of local labour — the only large hospital in a rural commuting zone.</a:t>
+            </a:r>
+          </a:p>
+          <a:p>
+            <a:pPr algn="l">
+              <a:lnSpc>
+                <a:spcPct val="105000"/>
+              </a:lnSpc>
+              <a:spcAft>
+                <a:spcPts val="800"/>
+              </a:spcAft>
+            </a:pPr>
+            <a:r>
+              <a:rPr sz="1700" b="0" i="0">
+                <a:solidFill>
+                  <a:srgbClr val="222222"/>
+                </a:solidFill>
+                <a:latin typeface="Calibri"/>
+              </a:rPr>
+              <a:t>•  The markdown is the labour analogue of the Lerner index (Day 1): less elastic supply =&gt; bigger wedge.</a:t>
+            </a:r>
+          </a:p>
+        </p:txBody>
+      </p:sp>
+      <p:sp>
+        <p:nvSpPr>
+          <p:cNvPr id="8" name="TextBox 7"/>
           <p:cNvSpPr txBox="1"/>
           <p:nvPr/>
         </p:nvSpPr>
@@ -15504,7 +15845,7 @@
             <a:avLst/>
           </a:prstGeom>
           <a:solidFill>
-            <a:srgbClr val="0072B2"/>
+            <a:srgbClr val="E69F00"/>
           </a:solidFill>
           <a:ln>
             <a:noFill/>
@@ -15570,7 +15911,7 @@
                 </a:solidFill>
                 <a:latin typeface="Calibri"/>
               </a:rPr>
-              <a:t>SA hook &amp; the monopsony evidence</a:t>
+              <a:t>Labour-market concentration (labour HHI)</a:t>
             </a:r>
           </a:p>
         </p:txBody>
@@ -15584,7 +15925,7 @@
         <p:spPr>
           <a:xfrm>
             <a:off x="548640" y="1188720"/>
-            <a:ext cx="11064240" cy="5029200"/>
+            <a:ext cx="11064240" cy="822960"/>
           </a:xfrm>
           <a:prstGeom prst="rect">
             <a:avLst/>
@@ -15602,36 +15943,147 @@
                 <a:spcPct val="105000"/>
               </a:lnSpc>
               <a:spcAft>
-                <a:spcPts val="900"/>
-              </a:spcAft>
-            </a:pPr>
-            <a:r>
-              <a:rPr sz="2000" b="0" i="0">
+                <a:spcPts val="600"/>
+              </a:spcAft>
+            </a:pPr>
+            <a:r>
+              <a:rPr sz="1800" b="0" i="0">
                 <a:solidFill>
                   <a:srgbClr val="222222"/>
                 </a:solidFill>
                 <a:latin typeface="Calibri"/>
               </a:rPr>
-              <a:t>•  Healthcare Market Inquiry: a few hospital groups hold &gt;80% of private beds -&gt; a structural monopsony over nurses and clinical labour in many regions.</a:t>
-            </a:r>
-          </a:p>
+              <a:t>Define the market as occupation × commuting zone, then apply the same HHI:</a:t>
+            </a:r>
+          </a:p>
+        </p:txBody>
+      </p:sp>
+      <p:sp>
+        <p:nvSpPr>
+          <p:cNvPr id="5" name="Rectangle 4"/>
+          <p:cNvSpPr/>
+          <p:nvPr/>
+        </p:nvSpPr>
+        <p:spPr>
+          <a:xfrm>
+            <a:off x="1097280" y="2240280"/>
+            <a:ext cx="9966960" cy="1371600"/>
+          </a:xfrm>
+          <a:prstGeom prst="rect">
+            <a:avLst/>
+          </a:prstGeom>
+          <a:solidFill>
+            <a:srgbClr val="F2F2F2"/>
+          </a:solidFill>
+          <a:ln w="12700">
+            <a:solidFill>
+              <a:srgbClr val="E69F00"/>
+            </a:solidFill>
+          </a:ln>
+          <a:effectLst/>
+        </p:spPr>
+        <p:style>
+          <a:lnRef idx="1">
+            <a:schemeClr val="accent1"/>
+          </a:lnRef>
+          <a:fillRef idx="3">
+            <a:schemeClr val="accent1"/>
+          </a:fillRef>
+          <a:effectRef idx="2">
+            <a:schemeClr val="accent1"/>
+          </a:effectRef>
+          <a:fontRef idx="minor">
+            <a:schemeClr val="lt1"/>
+          </a:fontRef>
+        </p:style>
+        <p:txBody>
+          <a:bodyPr rtlCol="0" anchor="ctr"/>
+          <a:lstStyle/>
+          <a:p>
+            <a:pPr algn="ctr"/>
+          </a:p>
+        </p:txBody>
+      </p:sp>
+      <p:sp>
+        <p:nvSpPr>
+          <p:cNvPr id="6" name="TextBox 5"/>
+          <p:cNvSpPr txBox="1"/>
+          <p:nvPr/>
+        </p:nvSpPr>
+        <p:spPr>
+          <a:xfrm>
+            <a:off x="1280160" y="2377440"/>
+            <a:ext cx="9601200" cy="1097280"/>
+          </a:xfrm>
+          <a:prstGeom prst="rect">
+            <a:avLst/>
+          </a:prstGeom>
+          <a:noFill/>
+        </p:spPr>
+        <p:txBody>
+          <a:bodyPr wrap="square" anchor="ctr">
+            <a:spAutoFit/>
+          </a:bodyPr>
+          <a:lstStyle/>
+          <a:p>
+            <a:pPr algn="ctr">
+              <a:lnSpc>
+                <a:spcPct val="110000"/>
+              </a:lnSpc>
+              <a:spcAft>
+                <a:spcPts val="600"/>
+              </a:spcAft>
+            </a:pPr>
+            <a:r>
+              <a:rPr sz="2400" b="1" i="0">
+                <a:solidFill>
+                  <a:srgbClr val="0072B2"/>
+                </a:solidFill>
+                <a:latin typeface="Consolas"/>
+              </a:rPr>
+              <a:t>Labour HHI = Σ (employment share_i)²</a:t>
+            </a:r>
+          </a:p>
+        </p:txBody>
+      </p:sp>
+      <p:sp>
+        <p:nvSpPr>
+          <p:cNvPr id="7" name="TextBox 6"/>
+          <p:cNvSpPr txBox="1"/>
+          <p:nvPr/>
+        </p:nvSpPr>
+        <p:spPr>
+          <a:xfrm>
+            <a:off x="548640" y="3931920"/>
+            <a:ext cx="11064240" cy="2194560"/>
+          </a:xfrm>
+          <a:prstGeom prst="rect">
+            <a:avLst/>
+          </a:prstGeom>
+          <a:noFill/>
+        </p:spPr>
+        <p:txBody>
+          <a:bodyPr wrap="square" anchor="t">
+            <a:spAutoFit/>
+          </a:bodyPr>
+          <a:lstStyle/>
           <a:p>
             <a:pPr algn="l">
               <a:lnSpc>
                 <a:spcPct val="105000"/>
               </a:lnSpc>
               <a:spcAft>
-                <a:spcPts val="900"/>
-              </a:spcAft>
-            </a:pPr>
-            <a:r>
-              <a:rPr sz="2000" b="0" i="0">
+                <a:spcPts val="800"/>
+              </a:spcAft>
+            </a:pPr>
+            <a:r>
+              <a:rPr sz="1700" b="0" i="0">
                 <a:solidFill>
                   <a:srgbClr val="222222"/>
                 </a:solidFill>
                 <a:latin typeface="Calibri"/>
               </a:rPr>
-              <a:t>•  The same concentration that raises prices to patients also depresses wages to clinical staff — one structure, two harms.</a:t>
+              <a:t>•  2023 Merger Guidelines flag concentration at HHI 1,800 (the 2010 figure was 2,500).</a:t>
             </a:r>
           </a:p>
           <a:p>
@@ -15640,17 +16092,17 @@
                 <a:spcPct val="105000"/>
               </a:lnSpc>
               <a:spcAft>
-                <a:spcPts val="900"/>
-              </a:spcAft>
-            </a:pPr>
-            <a:r>
-              <a:rPr sz="2000" b="0" i="0">
+                <a:spcPts val="800"/>
+              </a:spcAft>
+            </a:pPr>
+            <a:r>
+              <a:rPr sz="1700" b="0" i="0">
                 <a:solidFill>
                   <a:srgbClr val="222222"/>
                 </a:solidFill>
                 <a:latin typeface="Calibri"/>
               </a:rPr>
-              <a:t>•  SA tools reach this through market inquiries and §8 dominance in the buying market — the buyer-power case is statutorily available.</a:t>
+              <a:t>•  Many US local labour markets exceed 3,000 — highly concentrated (Azar–Marinescu–Steinbaum).</a:t>
             </a:r>
           </a:p>
           <a:p>
@@ -15659,24 +16111,43 @@
                 <a:spcPct val="105000"/>
               </a:lnSpc>
               <a:spcAft>
-                <a:spcPts val="900"/>
-              </a:spcAft>
-            </a:pPr>
-            <a:r>
-              <a:rPr sz="2000" b="0" i="0">
+                <a:spcPts val="800"/>
+              </a:spcAft>
+            </a:pPr>
+            <a:r>
+              <a:rPr sz="1700" b="0" i="0">
                 <a:solidFill>
                   <a:srgbClr val="222222"/>
                 </a:solidFill>
                 <a:latin typeface="Calibri"/>
               </a:rPr>
-              <a:t>•  For the expert: build the labour HHI by occupation × region, then connect concentration to the wage markdown the supply elasticity implies.</a:t>
-            </a:r>
-          </a:p>
-        </p:txBody>
-      </p:sp>
-      <p:sp>
-        <p:nvSpPr>
-          <p:cNvPr id="5" name="TextBox 4"/>
+              <a:t>•  Same arithmetic as product-market HHI; the work is defining the geography (commute) and the occupation correctly.</a:t>
+            </a:r>
+          </a:p>
+          <a:p>
+            <a:pPr algn="l">
+              <a:lnSpc>
+                <a:spcPct val="105000"/>
+              </a:lnSpc>
+              <a:spcAft>
+                <a:spcPts val="800"/>
+              </a:spcAft>
+            </a:pPr>
+            <a:r>
+              <a:rPr sz="1700" b="0" i="0">
+                <a:solidFill>
+                  <a:srgbClr val="222222"/>
+                </a:solidFill>
+                <a:latin typeface="Calibri"/>
+              </a:rPr>
+              <a:t>•  A merger can be benign in the product market but anticompetitive in the labour market — review both.</a:t>
+            </a:r>
+          </a:p>
+        </p:txBody>
+      </p:sp>
+      <p:sp>
+        <p:nvSpPr>
+          <p:cNvPr id="8" name="TextBox 7"/>
           <p:cNvSpPr txBox="1"/>
           <p:nvPr/>
         </p:nvSpPr>
@@ -15749,7 +16220,7 @@
             <a:avLst/>
           </a:prstGeom>
           <a:solidFill>
-            <a:srgbClr val="009E73"/>
+            <a:srgbClr val="0072B2"/>
           </a:solidFill>
           <a:ln>
             <a:noFill/>
@@ -15815,7 +16286,7 @@
                 </a:solidFill>
                 <a:latin typeface="Calibri"/>
               </a:rPr>
-              <a:t>Code as demo — labour HHI and the markdown</a:t>
+              <a:t>Conduct: no-poach, wage-fixing, non-competes</a:t>
             </a:r>
           </a:p>
         </p:txBody>
@@ -15828,8 +16299,8 @@
         </p:nvSpPr>
         <p:spPr>
           <a:xfrm>
-            <a:off x="548640" y="1143000"/>
-            <a:ext cx="11064240" cy="640080"/>
+            <a:off x="548640" y="1188720"/>
+            <a:ext cx="11064240" cy="5029200"/>
           </a:xfrm>
           <a:prstGeom prst="rect">
             <a:avLst/>
@@ -15844,286 +16315,84 @@
           <a:p>
             <a:pPr algn="l">
               <a:lnSpc>
-                <a:spcPct val="100000"/>
-              </a:lnSpc>
-              <a:spcAft>
-                <a:spcPts val="600"/>
-              </a:spcAft>
-            </a:pPr>
-            <a:r>
-              <a:rPr sz="1600" b="0" i="1">
-                <a:solidFill>
-                  <a:srgbClr val="555555"/>
-                </a:solidFill>
-                <a:latin typeface="Calibri"/>
-              </a:rPr>
-              <a:t>Book Ch. 10. Same helper as product markets.</a:t>
-            </a:r>
-          </a:p>
-        </p:txBody>
-      </p:sp>
-      <p:sp>
-        <p:nvSpPr>
-          <p:cNvPr id="5" name="Rectangle 4"/>
-          <p:cNvSpPr/>
-          <p:nvPr/>
-        </p:nvSpPr>
-        <p:spPr>
-          <a:xfrm>
-            <a:off x="548640" y="1783080"/>
-            <a:ext cx="11064240" cy="3108960"/>
-          </a:xfrm>
-          <a:prstGeom prst="rect">
-            <a:avLst/>
-          </a:prstGeom>
-          <a:solidFill>
-            <a:srgbClr val="1E1E1E"/>
-          </a:solidFill>
-          <a:ln>
-            <a:noFill/>
-          </a:ln>
-          <a:effectLst/>
-        </p:spPr>
-        <p:style>
-          <a:lnRef idx="1">
-            <a:schemeClr val="accent1"/>
-          </a:lnRef>
-          <a:fillRef idx="3">
-            <a:schemeClr val="accent1"/>
-          </a:fillRef>
-          <a:effectRef idx="2">
-            <a:schemeClr val="accent1"/>
-          </a:effectRef>
-          <a:fontRef idx="minor">
-            <a:schemeClr val="lt1"/>
-          </a:fontRef>
-        </p:style>
-        <p:txBody>
-          <a:bodyPr rtlCol="0" anchor="ctr"/>
-          <a:lstStyle/>
-          <a:p>
-            <a:pPr algn="ctr"/>
-          </a:p>
-        </p:txBody>
-      </p:sp>
-      <p:sp>
-        <p:nvSpPr>
-          <p:cNvPr id="6" name="TextBox 5"/>
-          <p:cNvSpPr txBox="1"/>
-          <p:nvPr/>
-        </p:nvSpPr>
-        <p:spPr>
-          <a:xfrm>
-            <a:off x="777240" y="1920240"/>
-            <a:ext cx="10698480" cy="2834640"/>
-          </a:xfrm>
-          <a:prstGeom prst="rect">
-            <a:avLst/>
-          </a:prstGeom>
-          <a:noFill/>
-        </p:spPr>
-        <p:txBody>
-          <a:bodyPr wrap="square" anchor="t">
-            <a:spAutoFit/>
-          </a:bodyPr>
-          <a:lstStyle/>
-          <a:p>
-            <a:pPr algn="l">
-              <a:lnSpc>
-                <a:spcPct val="100000"/>
-              </a:lnSpc>
-              <a:spcAft>
-                <a:spcPts val="200"/>
-              </a:spcAft>
-            </a:pPr>
-            <a:r>
-              <a:rPr sz="1400" b="0" i="0">
-                <a:solidFill>
-                  <a:srgbClr val="E6E6E6"/>
-                </a:solidFill>
-                <a:latin typeface="Consolas"/>
-              </a:rPr>
-              <a:t>source("program/R/helpers.R")</a:t>
-            </a:r>
-          </a:p>
-          <a:p>
-            <a:pPr algn="l">
-              <a:lnSpc>
-                <a:spcPct val="100000"/>
-              </a:lnSpc>
-              <a:spcAft>
-                <a:spcPts val="200"/>
-              </a:spcAft>
-            </a:pPr>
-            <a:r>
-              <a:rPr sz="1400" b="0" i="0">
-                <a:solidFill>
-                  <a:srgbClr val="E6E6E6"/>
-                </a:solidFill>
-                <a:latin typeface="Consolas"/>
-              </a:rPr>
-              <a:t>shares   &lt;- c(50, 30, 20)        # hiring shares, %</a:t>
-            </a:r>
-          </a:p>
-          <a:p>
-            <a:pPr algn="l">
-              <a:lnSpc>
-                <a:spcPct val="100000"/>
-              </a:lnSpc>
-              <a:spcAft>
-                <a:spcPts val="200"/>
-              </a:spcAft>
-            </a:pPr>
-            <a:r>
-              <a:rPr sz="1400" b="0" i="0">
-                <a:solidFill>
-                  <a:srgbClr val="E6E6E6"/>
-                </a:solidFill>
-                <a:latin typeface="Consolas"/>
-              </a:rPr>
-              <a:t>hhi      &lt;- sum(shares^2)        # 3800  -&gt; concentrated</a:t>
-            </a:r>
-          </a:p>
-          <a:p>
-            <a:pPr algn="l">
-              <a:lnSpc>
-                <a:spcPct val="100000"/>
-              </a:lnSpc>
-              <a:spcAft>
-                <a:spcPts val="200"/>
-              </a:spcAft>
-            </a:pPr>
-            <a:r>
-              <a:rPr sz="1400" b="0" i="0">
-                <a:solidFill>
-                  <a:srgbClr val="E6E6E6"/>
-                </a:solidFill>
-                <a:latin typeface="Consolas"/>
-              </a:rPr>
-              <a:t>eta      &lt;- 2                    # labour-supply elasticity</a:t>
-            </a:r>
-          </a:p>
-          <a:p>
-            <a:pPr algn="l">
-              <a:lnSpc>
-                <a:spcPct val="100000"/>
-              </a:lnSpc>
-              <a:spcAft>
-                <a:spcPts val="200"/>
-              </a:spcAft>
-            </a:pPr>
-            <a:r>
-              <a:rPr sz="1400" b="0" i="0">
-                <a:solidFill>
-                  <a:srgbClr val="E6E6E6"/>
-                </a:solidFill>
-                <a:latin typeface="Consolas"/>
-              </a:rPr>
-              <a:t>markdown &lt;- 1 - eta/(1+eta)      # 0.333 -&gt; 33% below MRPL</a:t>
-            </a:r>
-          </a:p>
-        </p:txBody>
-      </p:sp>
-      <p:sp>
-        <p:nvSpPr>
-          <p:cNvPr id="7" name="Rectangle 6"/>
-          <p:cNvSpPr/>
-          <p:nvPr/>
-        </p:nvSpPr>
-        <p:spPr>
-          <a:xfrm>
-            <a:off x="548640" y="5074920"/>
-            <a:ext cx="11064240" cy="1097280"/>
-          </a:xfrm>
-          <a:prstGeom prst="rect">
-            <a:avLst/>
-          </a:prstGeom>
-          <a:solidFill>
-            <a:srgbClr val="F2F2F2"/>
-          </a:solidFill>
-          <a:ln w="12700">
-            <a:solidFill>
-              <a:srgbClr val="009E73"/>
-            </a:solidFill>
-          </a:ln>
-          <a:effectLst/>
-        </p:spPr>
-        <p:style>
-          <a:lnRef idx="1">
-            <a:schemeClr val="accent1"/>
-          </a:lnRef>
-          <a:fillRef idx="3">
-            <a:schemeClr val="accent1"/>
-          </a:fillRef>
-          <a:effectRef idx="2">
-            <a:schemeClr val="accent1"/>
-          </a:effectRef>
-          <a:fontRef idx="minor">
-            <a:schemeClr val="lt1"/>
-          </a:fontRef>
-        </p:style>
-        <p:txBody>
-          <a:bodyPr rtlCol="0" anchor="ctr"/>
-          <a:lstStyle/>
-          <a:p>
-            <a:pPr algn="ctr"/>
-          </a:p>
-        </p:txBody>
-      </p:sp>
-      <p:sp>
-        <p:nvSpPr>
-          <p:cNvPr id="8" name="TextBox 7"/>
-          <p:cNvSpPr txBox="1"/>
-          <p:nvPr/>
-        </p:nvSpPr>
-        <p:spPr>
-          <a:xfrm>
-            <a:off x="731520" y="5166360"/>
-            <a:ext cx="10698480" cy="914400"/>
-          </a:xfrm>
-          <a:prstGeom prst="rect">
-            <a:avLst/>
-          </a:prstGeom>
-          <a:noFill/>
-        </p:spPr>
-        <p:txBody>
-          <a:bodyPr wrap="square" anchor="ctr">
-            <a:spAutoFit/>
-          </a:bodyPr>
-          <a:lstStyle/>
-          <a:p>
-            <a:pPr algn="l">
-              <a:lnSpc>
-                <a:spcPct val="103000"/>
-              </a:lnSpc>
-              <a:spcAft>
-                <a:spcPts val="600"/>
-              </a:spcAft>
-            </a:pPr>
-            <a:r>
-              <a:rPr sz="1600" b="1" i="0">
-                <a:solidFill>
-                  <a:srgbClr val="009E73"/>
-                </a:solidFill>
-                <a:latin typeface="Calibri"/>
-              </a:rPr>
-              <a:t>Point at:  </a:t>
-            </a:r>
-            <a:r>
-              <a:rPr sz="1600" b="0" i="0">
+                <a:spcPct val="105000"/>
+              </a:lnSpc>
+              <a:spcAft>
+                <a:spcPts val="900"/>
+              </a:spcAft>
+            </a:pPr>
+            <a:r>
+              <a:rPr sz="2000" b="0" i="0">
                 <a:solidFill>
                   <a:srgbClr val="222222"/>
                 </a:solidFill>
                 <a:latin typeface="Calibri"/>
               </a:rPr>
-              <a:t>HHI 3,800 (&gt; 1,800) and a 33% markdown: concentration and the wage gap tell the same story.</a:t>
-            </a:r>
-          </a:p>
-        </p:txBody>
-      </p:sp>
-      <p:sp>
-        <p:nvSpPr>
-          <p:cNvPr id="9" name="TextBox 8"/>
+              <a:t>•  No-poach agreements between employers (incl. across franchisees) and wage-fixing — the US DOJ treats naked versions as per se criminal, like price-fixing.</a:t>
+            </a:r>
+          </a:p>
+          <a:p>
+            <a:pPr algn="l">
+              <a:lnSpc>
+                <a:spcPct val="105000"/>
+              </a:lnSpc>
+              <a:spcAft>
+                <a:spcPts val="900"/>
+              </a:spcAft>
+            </a:pPr>
+            <a:r>
+              <a:rPr sz="2000" b="0" i="0">
+                <a:solidFill>
+                  <a:srgbClr val="222222"/>
+                </a:solidFill>
+                <a:latin typeface="Calibri"/>
+              </a:rPr>
+              <a:t>•  Reality check: Jindal (physical therapists) — jury ACQUITTED on the Sherman counts; DaVita — defendants ACQUITTED (2022). Hard to win criminally, but the cases reshaped compliance.</a:t>
+            </a:r>
+          </a:p>
+          <a:p>
+            <a:pPr algn="l">
+              <a:lnSpc>
+                <a:spcPct val="105000"/>
+              </a:lnSpc>
+              <a:spcAft>
+                <a:spcPts val="900"/>
+              </a:spcAft>
+            </a:pPr>
+            <a:r>
+              <a:rPr sz="2000" b="0" i="0">
+                <a:solidFill>
+                  <a:srgbClr val="222222"/>
+                </a:solidFill>
+                <a:latin typeface="Calibri"/>
+              </a:rPr>
+              <a:t>•  Non-competes bind workers post-employment (~18% of US workers); they cut mobility and shave wages. The FTC's 2024 ban was SET ASIDE (Ryan v. FTC); the appeal was dropped (2025) -&gt; back to case-by-case enforcement.</a:t>
+            </a:r>
+          </a:p>
+          <a:p>
+            <a:pPr algn="l">
+              <a:lnSpc>
+                <a:spcPct val="105000"/>
+              </a:lnSpc>
+              <a:spcAft>
+                <a:spcPts val="900"/>
+              </a:spcAft>
+            </a:pPr>
+            <a:r>
+              <a:rPr sz="2000" b="0" i="0">
+                <a:solidFill>
+                  <a:srgbClr val="222222"/>
+                </a:solidFill>
+                <a:latin typeface="Calibri"/>
+              </a:rPr>
+              <a:t>•  Information sharing on pay (benchmarking surveys, algorithms) can facilitate coordination short of an explicit agreement.</a:t>
+            </a:r>
+          </a:p>
+        </p:txBody>
+      </p:sp>
+      <p:sp>
+        <p:nvSpPr>
+          <p:cNvPr id="5" name="TextBox 4"/>
           <p:cNvSpPr txBox="1"/>
           <p:nvPr/>
         </p:nvSpPr>
@@ -16190,7 +16459,7 @@
         <p:spPr>
           <a:xfrm>
             <a:off x="0" y="0"/>
-            <a:ext cx="12191695" cy="6858000"/>
+            <a:ext cx="12191695" cy="960120"/>
           </a:xfrm>
           <a:prstGeom prst="rect">
             <a:avLst/>
@@ -16227,45 +16496,43 @@
       </p:sp>
       <p:sp>
         <p:nvSpPr>
-          <p:cNvPr id="3" name="Rectangle 2"/>
-          <p:cNvSpPr/>
-          <p:nvPr/>
-        </p:nvSpPr>
-        <p:spPr>
-          <a:xfrm>
-            <a:off x="731520" y="3200400"/>
-            <a:ext cx="3657600" cy="54864"/>
-          </a:xfrm>
-          <a:prstGeom prst="rect">
-            <a:avLst/>
-          </a:prstGeom>
-          <a:solidFill>
-            <a:srgbClr val="FFFFFF"/>
-          </a:solidFill>
-          <a:ln>
-            <a:noFill/>
-          </a:ln>
-          <a:effectLst/>
-        </p:spPr>
-        <p:style>
-          <a:lnRef idx="1">
-            <a:schemeClr val="accent1"/>
-          </a:lnRef>
-          <a:fillRef idx="3">
-            <a:schemeClr val="accent1"/>
-          </a:fillRef>
-          <a:effectRef idx="2">
-            <a:schemeClr val="accent1"/>
-          </a:effectRef>
-          <a:fontRef idx="minor">
-            <a:schemeClr val="lt1"/>
-          </a:fontRef>
-        </p:style>
-        <p:txBody>
-          <a:bodyPr rtlCol="0" anchor="ctr"/>
-          <a:lstStyle/>
-          <a:p>
-            <a:pPr algn="ctr"/>
+          <p:cNvPr id="3" name="TextBox 2"/>
+          <p:cNvSpPr txBox="1"/>
+          <p:nvPr/>
+        </p:nvSpPr>
+        <p:spPr>
+          <a:xfrm>
+            <a:off x="457200" y="109728"/>
+            <a:ext cx="11247120" cy="731520"/>
+          </a:xfrm>
+          <a:prstGeom prst="rect">
+            <a:avLst/>
+          </a:prstGeom>
+          <a:noFill/>
+        </p:spPr>
+        <p:txBody>
+          <a:bodyPr wrap="square" anchor="ctr">
+            <a:spAutoFit/>
+          </a:bodyPr>
+          <a:lstStyle/>
+          <a:p>
+            <a:pPr algn="l">
+              <a:lnSpc>
+                <a:spcPct val="100000"/>
+              </a:lnSpc>
+              <a:spcAft>
+                <a:spcPts val="600"/>
+              </a:spcAft>
+            </a:pPr>
+            <a:r>
+              <a:rPr sz="2800" b="1" i="0">
+                <a:solidFill>
+                  <a:srgbClr val="FFFFFF"/>
+                </a:solidFill>
+                <a:latin typeface="Calibri"/>
+              </a:rPr>
+              <a:t>SA hook &amp; the monopsony evidence</a:t>
+            </a:r>
           </a:p>
         </p:txBody>
       </p:sp>
@@ -16277,16 +16544,115 @@
         </p:nvSpPr>
         <p:spPr>
           <a:xfrm>
-            <a:off x="731520" y="2194560"/>
-            <a:ext cx="10698480" cy="1371600"/>
-          </a:xfrm>
-          <a:prstGeom prst="rect">
-            <a:avLst/>
-          </a:prstGeom>
-          <a:noFill/>
-        </p:spPr>
-        <p:txBody>
-          <a:bodyPr wrap="square" anchor="b">
+            <a:off x="548640" y="1188720"/>
+            <a:ext cx="11064240" cy="5029200"/>
+          </a:xfrm>
+          <a:prstGeom prst="rect">
+            <a:avLst/>
+          </a:prstGeom>
+          <a:noFill/>
+        </p:spPr>
+        <p:txBody>
+          <a:bodyPr wrap="square" anchor="t">
+            <a:spAutoFit/>
+          </a:bodyPr>
+          <a:lstStyle/>
+          <a:p>
+            <a:pPr algn="l">
+              <a:lnSpc>
+                <a:spcPct val="105000"/>
+              </a:lnSpc>
+              <a:spcAft>
+                <a:spcPts val="900"/>
+              </a:spcAft>
+            </a:pPr>
+            <a:r>
+              <a:rPr sz="2000" b="0" i="0">
+                <a:solidFill>
+                  <a:srgbClr val="222222"/>
+                </a:solidFill>
+                <a:latin typeface="Calibri"/>
+              </a:rPr>
+              <a:t>•  Healthcare Market Inquiry: a few hospital groups hold &gt;80% of private beds -&gt; a structural monopsony over nurses and clinical labour in many regions.</a:t>
+            </a:r>
+          </a:p>
+          <a:p>
+            <a:pPr algn="l">
+              <a:lnSpc>
+                <a:spcPct val="105000"/>
+              </a:lnSpc>
+              <a:spcAft>
+                <a:spcPts val="900"/>
+              </a:spcAft>
+            </a:pPr>
+            <a:r>
+              <a:rPr sz="2000" b="0" i="0">
+                <a:solidFill>
+                  <a:srgbClr val="222222"/>
+                </a:solidFill>
+                <a:latin typeface="Calibri"/>
+              </a:rPr>
+              <a:t>•  The same concentration that raises prices to patients also depresses wages to clinical staff — one structure, two harms.</a:t>
+            </a:r>
+          </a:p>
+          <a:p>
+            <a:pPr algn="l">
+              <a:lnSpc>
+                <a:spcPct val="105000"/>
+              </a:lnSpc>
+              <a:spcAft>
+                <a:spcPts val="900"/>
+              </a:spcAft>
+            </a:pPr>
+            <a:r>
+              <a:rPr sz="2000" b="0" i="0">
+                <a:solidFill>
+                  <a:srgbClr val="222222"/>
+                </a:solidFill>
+                <a:latin typeface="Calibri"/>
+              </a:rPr>
+              <a:t>•  SA tools reach this through market inquiries and §8 dominance in the buying market — the buyer-power case is statutorily available.</a:t>
+            </a:r>
+          </a:p>
+          <a:p>
+            <a:pPr algn="l">
+              <a:lnSpc>
+                <a:spcPct val="105000"/>
+              </a:lnSpc>
+              <a:spcAft>
+                <a:spcPts val="900"/>
+              </a:spcAft>
+            </a:pPr>
+            <a:r>
+              <a:rPr sz="2000" b="0" i="0">
+                <a:solidFill>
+                  <a:srgbClr val="222222"/>
+                </a:solidFill>
+                <a:latin typeface="Calibri"/>
+              </a:rPr>
+              <a:t>•  For the expert: build the labour HHI by occupation × region, then connect concentration to the wage markdown the supply elasticity implies.</a:t>
+            </a:r>
+          </a:p>
+        </p:txBody>
+      </p:sp>
+      <p:sp>
+        <p:nvSpPr>
+          <p:cNvPr id="5" name="TextBox 4"/>
+          <p:cNvSpPr txBox="1"/>
+          <p:nvPr/>
+        </p:nvSpPr>
+        <p:spPr>
+          <a:xfrm>
+            <a:off x="457200" y="6446520"/>
+            <a:ext cx="11247120" cy="320040"/>
+          </a:xfrm>
+          <a:prstGeom prst="rect">
+            <a:avLst/>
+          </a:prstGeom>
+          <a:noFill/>
+        </p:spPr>
+        <p:txBody>
+          <a:bodyPr wrap="square" anchor="t">
             <a:spAutoFit/>
           </a:bodyPr>
           <a:lstStyle/>
@@ -16300,55 +16666,13 @@
               </a:spcAft>
             </a:pPr>
             <a:r>
-              <a:rPr sz="3400" b="1" i="0">
-                <a:solidFill>
-                  <a:srgbClr val="FFFFFF"/>
-                </a:solidFill>
-                <a:latin typeface="Calibri"/>
-              </a:rPr>
-              <a:t>Module 2.5 — Digital markets and platforms</a:t>
-            </a:r>
-          </a:p>
-        </p:txBody>
-      </p:sp>
-      <p:sp>
-        <p:nvSpPr>
-          <p:cNvPr id="5" name="TextBox 4"/>
-          <p:cNvSpPr txBox="1"/>
-          <p:nvPr/>
-        </p:nvSpPr>
-        <p:spPr>
-          <a:xfrm>
-            <a:off x="731520" y="3383280"/>
-            <a:ext cx="10698480" cy="1097280"/>
-          </a:xfrm>
-          <a:prstGeom prst="rect">
-            <a:avLst/>
-          </a:prstGeom>
-          <a:noFill/>
-        </p:spPr>
-        <p:txBody>
-          <a:bodyPr wrap="square" anchor="t">
-            <a:spAutoFit/>
-          </a:bodyPr>
-          <a:lstStyle/>
-          <a:p>
-            <a:pPr algn="l">
-              <a:lnSpc>
-                <a:spcPct val="100000"/>
-              </a:lnSpc>
-              <a:spcAft>
-                <a:spcPts val="600"/>
-              </a:spcAft>
-            </a:pPr>
-            <a:r>
-              <a:rPr sz="1800" b="0" i="0">
-                <a:solidFill>
-                  <a:srgbClr val="DDEEFF"/>
-                </a:solidFill>
-                <a:latin typeface="Calibri"/>
-              </a:rPr>
-              <a:t>Multi-sided, data-rich, fast-moving. New measurement problems, familiar theories of harm.</a:t>
+              <a:rPr sz="1000" b="0" i="0">
+                <a:solidFill>
+                  <a:srgbClr val="555555"/>
+                </a:solidFill>
+                <a:latin typeface="Calibri"/>
+              </a:rPr>
+              <a:t>Day 2 · Conduct</a:t>
             </a:r>
           </a:p>
         </p:txBody>
@@ -16386,7 +16710,7 @@
             <a:avLst/>
           </a:prstGeom>
           <a:solidFill>
-            <a:srgbClr val="0072B2"/>
+            <a:srgbClr val="009E73"/>
           </a:solidFill>
           <a:ln>
             <a:noFill/>
@@ -16452,7 +16776,7 @@
                 </a:solidFill>
                 <a:latin typeface="Calibri"/>
               </a:rPr>
-              <a:t>What makes platforms different</a:t>
+              <a:t>Code as demo — labour HHI and the markdown</a:t>
             </a:r>
           </a:p>
         </p:txBody>
@@ -16465,8 +16789,8 @@
         </p:nvSpPr>
         <p:spPr>
           <a:xfrm>
-            <a:off x="548640" y="1188720"/>
-            <a:ext cx="11064240" cy="5029200"/>
+            <a:off x="548640" y="1143000"/>
+            <a:ext cx="11064240" cy="640080"/>
           </a:xfrm>
           <a:prstGeom prst="rect">
             <a:avLst/>
@@ -16481,103 +16805,286 @@
           <a:p>
             <a:pPr algn="l">
               <a:lnSpc>
-                <a:spcPct val="105000"/>
-              </a:lnSpc>
-              <a:spcAft>
-                <a:spcPts val="900"/>
-              </a:spcAft>
-            </a:pPr>
-            <a:r>
-              <a:rPr sz="2000" b="0" i="0">
+                <a:spcPct val="100000"/>
+              </a:lnSpc>
+              <a:spcAft>
+                <a:spcPts val="600"/>
+              </a:spcAft>
+            </a:pPr>
+            <a:r>
+              <a:rPr sz="1600" b="0" i="1">
+                <a:solidFill>
+                  <a:srgbClr val="555555"/>
+                </a:solidFill>
+                <a:latin typeface="Calibri"/>
+              </a:rPr>
+              <a:t>Book Ch. 10. Same helper as product markets.</a:t>
+            </a:r>
+          </a:p>
+        </p:txBody>
+      </p:sp>
+      <p:sp>
+        <p:nvSpPr>
+          <p:cNvPr id="5" name="Rectangle 4"/>
+          <p:cNvSpPr/>
+          <p:nvPr/>
+        </p:nvSpPr>
+        <p:spPr>
+          <a:xfrm>
+            <a:off x="548640" y="1783080"/>
+            <a:ext cx="11064240" cy="3108960"/>
+          </a:xfrm>
+          <a:prstGeom prst="rect">
+            <a:avLst/>
+          </a:prstGeom>
+          <a:solidFill>
+            <a:srgbClr val="1E1E1E"/>
+          </a:solidFill>
+          <a:ln>
+            <a:noFill/>
+          </a:ln>
+          <a:effectLst/>
+        </p:spPr>
+        <p:style>
+          <a:lnRef idx="1">
+            <a:schemeClr val="accent1"/>
+          </a:lnRef>
+          <a:fillRef idx="3">
+            <a:schemeClr val="accent1"/>
+          </a:fillRef>
+          <a:effectRef idx="2">
+            <a:schemeClr val="accent1"/>
+          </a:effectRef>
+          <a:fontRef idx="minor">
+            <a:schemeClr val="lt1"/>
+          </a:fontRef>
+        </p:style>
+        <p:txBody>
+          <a:bodyPr rtlCol="0" anchor="ctr"/>
+          <a:lstStyle/>
+          <a:p>
+            <a:pPr algn="ctr"/>
+          </a:p>
+        </p:txBody>
+      </p:sp>
+      <p:sp>
+        <p:nvSpPr>
+          <p:cNvPr id="6" name="TextBox 5"/>
+          <p:cNvSpPr txBox="1"/>
+          <p:nvPr/>
+        </p:nvSpPr>
+        <p:spPr>
+          <a:xfrm>
+            <a:off x="777240" y="1920240"/>
+            <a:ext cx="10698480" cy="2834640"/>
+          </a:xfrm>
+          <a:prstGeom prst="rect">
+            <a:avLst/>
+          </a:prstGeom>
+          <a:noFill/>
+        </p:spPr>
+        <p:txBody>
+          <a:bodyPr wrap="square" anchor="t">
+            <a:spAutoFit/>
+          </a:bodyPr>
+          <a:lstStyle/>
+          <a:p>
+            <a:pPr algn="l">
+              <a:lnSpc>
+                <a:spcPct val="100000"/>
+              </a:lnSpc>
+              <a:spcAft>
+                <a:spcPts val="200"/>
+              </a:spcAft>
+            </a:pPr>
+            <a:r>
+              <a:rPr sz="1400" b="0" i="0">
+                <a:solidFill>
+                  <a:srgbClr val="E6E6E6"/>
+                </a:solidFill>
+                <a:latin typeface="Consolas"/>
+              </a:rPr>
+              <a:t>source("program/R/helpers.R")</a:t>
+            </a:r>
+          </a:p>
+          <a:p>
+            <a:pPr algn="l">
+              <a:lnSpc>
+                <a:spcPct val="100000"/>
+              </a:lnSpc>
+              <a:spcAft>
+                <a:spcPts val="200"/>
+              </a:spcAft>
+            </a:pPr>
+            <a:r>
+              <a:rPr sz="1400" b="0" i="0">
+                <a:solidFill>
+                  <a:srgbClr val="E6E6E6"/>
+                </a:solidFill>
+                <a:latin typeface="Consolas"/>
+              </a:rPr>
+              <a:t>shares   &lt;- c(50, 30, 20)        # hiring shares, %</a:t>
+            </a:r>
+          </a:p>
+          <a:p>
+            <a:pPr algn="l">
+              <a:lnSpc>
+                <a:spcPct val="100000"/>
+              </a:lnSpc>
+              <a:spcAft>
+                <a:spcPts val="200"/>
+              </a:spcAft>
+            </a:pPr>
+            <a:r>
+              <a:rPr sz="1400" b="0" i="0">
+                <a:solidFill>
+                  <a:srgbClr val="E6E6E6"/>
+                </a:solidFill>
+                <a:latin typeface="Consolas"/>
+              </a:rPr>
+              <a:t>hhi      &lt;- sum(shares^2)        # 3800  -&gt; concentrated</a:t>
+            </a:r>
+          </a:p>
+          <a:p>
+            <a:pPr algn="l">
+              <a:lnSpc>
+                <a:spcPct val="100000"/>
+              </a:lnSpc>
+              <a:spcAft>
+                <a:spcPts val="200"/>
+              </a:spcAft>
+            </a:pPr>
+            <a:r>
+              <a:rPr sz="1400" b="0" i="0">
+                <a:solidFill>
+                  <a:srgbClr val="E6E6E6"/>
+                </a:solidFill>
+                <a:latin typeface="Consolas"/>
+              </a:rPr>
+              <a:t>eta      &lt;- 2                    # labour-supply elasticity</a:t>
+            </a:r>
+          </a:p>
+          <a:p>
+            <a:pPr algn="l">
+              <a:lnSpc>
+                <a:spcPct val="100000"/>
+              </a:lnSpc>
+              <a:spcAft>
+                <a:spcPts val="200"/>
+              </a:spcAft>
+            </a:pPr>
+            <a:r>
+              <a:rPr sz="1400" b="0" i="0">
+                <a:solidFill>
+                  <a:srgbClr val="E6E6E6"/>
+                </a:solidFill>
+                <a:latin typeface="Consolas"/>
+              </a:rPr>
+              <a:t>markdown &lt;- 1 - eta/(1+eta)      # 0.333 -&gt; 33% below MRPL</a:t>
+            </a:r>
+          </a:p>
+        </p:txBody>
+      </p:sp>
+      <p:sp>
+        <p:nvSpPr>
+          <p:cNvPr id="7" name="Rectangle 6"/>
+          <p:cNvSpPr/>
+          <p:nvPr/>
+        </p:nvSpPr>
+        <p:spPr>
+          <a:xfrm>
+            <a:off x="548640" y="5074920"/>
+            <a:ext cx="11064240" cy="1097280"/>
+          </a:xfrm>
+          <a:prstGeom prst="rect">
+            <a:avLst/>
+          </a:prstGeom>
+          <a:solidFill>
+            <a:srgbClr val="F2F2F2"/>
+          </a:solidFill>
+          <a:ln w="12700">
+            <a:solidFill>
+              <a:srgbClr val="009E73"/>
+            </a:solidFill>
+          </a:ln>
+          <a:effectLst/>
+        </p:spPr>
+        <p:style>
+          <a:lnRef idx="1">
+            <a:schemeClr val="accent1"/>
+          </a:lnRef>
+          <a:fillRef idx="3">
+            <a:schemeClr val="accent1"/>
+          </a:fillRef>
+          <a:effectRef idx="2">
+            <a:schemeClr val="accent1"/>
+          </a:effectRef>
+          <a:fontRef idx="minor">
+            <a:schemeClr val="lt1"/>
+          </a:fontRef>
+        </p:style>
+        <p:txBody>
+          <a:bodyPr rtlCol="0" anchor="ctr"/>
+          <a:lstStyle/>
+          <a:p>
+            <a:pPr algn="ctr"/>
+          </a:p>
+        </p:txBody>
+      </p:sp>
+      <p:sp>
+        <p:nvSpPr>
+          <p:cNvPr id="8" name="TextBox 7"/>
+          <p:cNvSpPr txBox="1"/>
+          <p:nvPr/>
+        </p:nvSpPr>
+        <p:spPr>
+          <a:xfrm>
+            <a:off x="731520" y="5166360"/>
+            <a:ext cx="10698480" cy="914400"/>
+          </a:xfrm>
+          <a:prstGeom prst="rect">
+            <a:avLst/>
+          </a:prstGeom>
+          <a:noFill/>
+        </p:spPr>
+        <p:txBody>
+          <a:bodyPr wrap="square" anchor="ctr">
+            <a:spAutoFit/>
+          </a:bodyPr>
+          <a:lstStyle/>
+          <a:p>
+            <a:pPr algn="l">
+              <a:lnSpc>
+                <a:spcPct val="103000"/>
+              </a:lnSpc>
+              <a:spcAft>
+                <a:spcPts val="600"/>
+              </a:spcAft>
+            </a:pPr>
+            <a:r>
+              <a:rPr sz="1600" b="1" i="0">
+                <a:solidFill>
+                  <a:srgbClr val="009E73"/>
+                </a:solidFill>
+                <a:latin typeface="Calibri"/>
+              </a:rPr>
+              <a:t>Point at:  </a:t>
+            </a:r>
+            <a:r>
+              <a:rPr sz="1600" b="0" i="0">
                 <a:solidFill>
                   <a:srgbClr val="222222"/>
                 </a:solidFill>
                 <a:latin typeface="Calibri"/>
               </a:rPr>
-              <a:t>•  Multi-sided: value on one side depends on the other (buyers/sellers, users/advertisers, riders/drivers).</a:t>
-            </a:r>
-          </a:p>
-          <a:p>
-            <a:pPr algn="l">
-              <a:lnSpc>
-                <a:spcPct val="105000"/>
-              </a:lnSpc>
-              <a:spcAft>
-                <a:spcPts val="900"/>
-              </a:spcAft>
-            </a:pPr>
-            <a:r>
-              <a:rPr sz="2000" b="0" i="0">
-                <a:solidFill>
-                  <a:srgbClr val="222222"/>
-                </a:solidFill>
-                <a:latin typeface="Calibri"/>
-              </a:rPr>
-              <a:t>•  Network effects — direct (more users -&gt; more value to users), indirect (more users -&gt; more sellers), and data network effects (more use -&gt; better product).</a:t>
-            </a:r>
-          </a:p>
-          <a:p>
-            <a:pPr algn="l">
-              <a:lnSpc>
-                <a:spcPct val="105000"/>
-              </a:lnSpc>
-              <a:spcAft>
-                <a:spcPts val="900"/>
-              </a:spcAft>
-            </a:pPr>
-            <a:r>
-              <a:rPr sz="2000" b="0" i="0">
-                <a:solidFill>
-                  <a:srgbClr val="222222"/>
-                </a:solidFill>
-                <a:latin typeface="Calibri"/>
-              </a:rPr>
-              <a:t>•  Switching costs and lock-in keep users put even when a rival is better.</a:t>
-            </a:r>
-          </a:p>
-          <a:p>
-            <a:pPr algn="l">
-              <a:lnSpc>
-                <a:spcPct val="105000"/>
-              </a:lnSpc>
-              <a:spcAft>
-                <a:spcPts val="900"/>
-              </a:spcAft>
-            </a:pPr>
-            <a:r>
-              <a:rPr sz="2000" b="0" i="0">
-                <a:solidFill>
-                  <a:srgbClr val="222222"/>
-                </a:solidFill>
-                <a:latin typeface="Calibri"/>
-              </a:rPr>
-              <a:t>•  Together these tip markets toward winner-take-all and durable, hard-to-contest positions ('gatekeeper' power).</a:t>
-            </a:r>
-          </a:p>
-          <a:p>
-            <a:pPr algn="l">
-              <a:lnSpc>
-                <a:spcPct val="105000"/>
-              </a:lnSpc>
-              <a:spcAft>
-                <a:spcPts val="900"/>
-              </a:spcAft>
-            </a:pPr>
-            <a:r>
-              <a:rPr sz="2000" b="0" i="0">
-                <a:solidFill>
-                  <a:srgbClr val="222222"/>
-                </a:solidFill>
-                <a:latin typeface="Calibri"/>
-              </a:rPr>
-              <a:t>•  Implication: a high share can be both a sign of quality AND a barrier — the analysis has to separate the two.</a:t>
-            </a:r>
-          </a:p>
-        </p:txBody>
-      </p:sp>
-      <p:sp>
-        <p:nvSpPr>
-          <p:cNvPr id="5" name="TextBox 4"/>
+              <a:t>HHI 3,800 (&gt; 1,800) and a 33% markdown: concentration and the wage gap tell the same story.</a:t>
+            </a:r>
+          </a:p>
+        </p:txBody>
+      </p:sp>
+      <p:sp>
+        <p:nvSpPr>
+          <p:cNvPr id="9" name="TextBox 8"/>
           <p:cNvSpPr txBox="1"/>
           <p:nvPr/>
         </p:nvSpPr>
@@ -16644,7 +17151,7 @@
         <p:spPr>
           <a:xfrm>
             <a:off x="0" y="0"/>
-            <a:ext cx="12191695" cy="960120"/>
+            <a:ext cx="12191695" cy="6858000"/>
           </a:xfrm>
           <a:prstGeom prst="rect">
             <a:avLst/>
@@ -16681,22 +17188,66 @@
       </p:sp>
       <p:sp>
         <p:nvSpPr>
-          <p:cNvPr id="3" name="TextBox 2"/>
-          <p:cNvSpPr txBox="1"/>
-          <p:nvPr/>
-        </p:nvSpPr>
-        <p:spPr>
-          <a:xfrm>
-            <a:off x="457200" y="109728"/>
-            <a:ext cx="11247120" cy="731520"/>
-          </a:xfrm>
-          <a:prstGeom prst="rect">
-            <a:avLst/>
-          </a:prstGeom>
-          <a:noFill/>
-        </p:spPr>
-        <p:txBody>
-          <a:bodyPr wrap="square" anchor="ctr">
+          <p:cNvPr id="3" name="Rectangle 2"/>
+          <p:cNvSpPr/>
+          <p:nvPr/>
+        </p:nvSpPr>
+        <p:spPr>
+          <a:xfrm>
+            <a:off x="731520" y="3200400"/>
+            <a:ext cx="3657600" cy="54864"/>
+          </a:xfrm>
+          <a:prstGeom prst="rect">
+            <a:avLst/>
+          </a:prstGeom>
+          <a:solidFill>
+            <a:srgbClr val="FFFFFF"/>
+          </a:solidFill>
+          <a:ln>
+            <a:noFill/>
+          </a:ln>
+          <a:effectLst/>
+        </p:spPr>
+        <p:style>
+          <a:lnRef idx="1">
+            <a:schemeClr val="accent1"/>
+          </a:lnRef>
+          <a:fillRef idx="3">
+            <a:schemeClr val="accent1"/>
+          </a:fillRef>
+          <a:effectRef idx="2">
+            <a:schemeClr val="accent1"/>
+          </a:effectRef>
+          <a:fontRef idx="minor">
+            <a:schemeClr val="lt1"/>
+          </a:fontRef>
+        </p:style>
+        <p:txBody>
+          <a:bodyPr rtlCol="0" anchor="ctr"/>
+          <a:lstStyle/>
+          <a:p>
+            <a:pPr algn="ctr"/>
+          </a:p>
+        </p:txBody>
+      </p:sp>
+      <p:sp>
+        <p:nvSpPr>
+          <p:cNvPr id="4" name="TextBox 3"/>
+          <p:cNvSpPr txBox="1"/>
+          <p:nvPr/>
+        </p:nvSpPr>
+        <p:spPr>
+          <a:xfrm>
+            <a:off x="731520" y="2194560"/>
+            <a:ext cx="10698480" cy="1371600"/>
+          </a:xfrm>
+          <a:prstGeom prst="rect">
+            <a:avLst/>
+          </a:prstGeom>
+          <a:noFill/>
+        </p:spPr>
+        <p:txBody>
+          <a:bodyPr wrap="square" anchor="b">
             <a:spAutoFit/>
           </a:bodyPr>
           <a:lstStyle/>
@@ -16710,27 +17261,27 @@
               </a:spcAft>
             </a:pPr>
             <a:r>
-              <a:rPr sz="2800" b="1" i="0">
+              <a:rPr sz="3400" b="1" i="0">
                 <a:solidFill>
                   <a:srgbClr val="FFFFFF"/>
                 </a:solidFill>
                 <a:latin typeface="Calibri"/>
               </a:rPr>
-              <a:t>...and what doesn't (familiar theories of harm)</a:t>
-            </a:r>
-          </a:p>
-        </p:txBody>
-      </p:sp>
-      <p:sp>
-        <p:nvSpPr>
-          <p:cNvPr id="4" name="TextBox 3"/>
-          <p:cNvSpPr txBox="1"/>
-          <p:nvPr/>
-        </p:nvSpPr>
-        <p:spPr>
-          <a:xfrm>
-            <a:off x="548640" y="1188720"/>
-            <a:ext cx="11064240" cy="5029200"/>
+              <a:t>Module 2.5 — Digital markets and platforms</a:t>
+            </a:r>
+          </a:p>
+        </p:txBody>
+      </p:sp>
+      <p:sp>
+        <p:nvSpPr>
+          <p:cNvPr id="5" name="TextBox 4"/>
+          <p:cNvSpPr txBox="1"/>
+          <p:nvPr/>
+        </p:nvSpPr>
+        <p:spPr>
+          <a:xfrm>
+            <a:off x="731520" y="3383280"/>
+            <a:ext cx="10698480" cy="1097280"/>
           </a:xfrm>
           <a:prstGeom prst="rect">
             <a:avLst/>
@@ -16745,105 +17296,6 @@
           <a:p>
             <a:pPr algn="l">
               <a:lnSpc>
-                <a:spcPct val="105000"/>
-              </a:lnSpc>
-              <a:spcAft>
-                <a:spcPts val="900"/>
-              </a:spcAft>
-            </a:pPr>
-            <a:r>
-              <a:rPr sz="2000" b="0" i="0">
-                <a:solidFill>
-                  <a:srgbClr val="222222"/>
-                </a:solidFill>
-                <a:latin typeface="Calibri"/>
-              </a:rPr>
-              <a:t>•  The conduct is old friends in new clothes: self-preferencing (leverage/discrimination), exclusion via defaults, tying/bundling, refusal to interoperate.</a:t>
-            </a:r>
-          </a:p>
-          <a:p>
-            <a:pPr algn="l">
-              <a:lnSpc>
-                <a:spcPct val="105000"/>
-              </a:lnSpc>
-              <a:spcAft>
-                <a:spcPts val="900"/>
-              </a:spcAft>
-            </a:pPr>
-            <a:r>
-              <a:rPr sz="2000" b="0" i="0">
-                <a:solidFill>
-                  <a:srgbClr val="222222"/>
-                </a:solidFill>
-                <a:latin typeface="Calibri"/>
-              </a:rPr>
-              <a:t>•  Zero price on one side breaks the SSNIP — use SSNDQ (small but significant DECREASE in quality: ad load, data extraction, degraded service) and watch the OTHER side's price.</a:t>
-            </a:r>
-          </a:p>
-          <a:p>
-            <a:pPr algn="l">
-              <a:lnSpc>
-                <a:spcPct val="105000"/>
-              </a:lnSpc>
-              <a:spcAft>
-                <a:spcPts val="900"/>
-              </a:spcAft>
-            </a:pPr>
-            <a:r>
-              <a:rPr sz="2000" b="0" i="0">
-                <a:solidFill>
-                  <a:srgbClr val="222222"/>
-                </a:solidFill>
-                <a:latin typeface="Calibri"/>
-              </a:rPr>
-              <a:t>•  Defaults move behaviour even when switching is nominally free — the central empirical fact of the search cases.</a:t>
-            </a:r>
-          </a:p>
-          <a:p>
-            <a:pPr algn="l">
-              <a:lnSpc>
-                <a:spcPct val="105000"/>
-              </a:lnSpc>
-              <a:spcAft>
-                <a:spcPts val="900"/>
-              </a:spcAft>
-            </a:pPr>
-            <a:r>
-              <a:rPr sz="2000" b="0" i="0">
-                <a:solidFill>
-                  <a:srgbClr val="222222"/>
-                </a:solidFill>
-                <a:latin typeface="Calibri"/>
-              </a:rPr>
-              <a:t>•  So the toolkit transfers: define the market (carefully, around zero prices), measure foreclosure / favouritism, weigh justifications.</a:t>
-            </a:r>
-          </a:p>
-        </p:txBody>
-      </p:sp>
-      <p:sp>
-        <p:nvSpPr>
-          <p:cNvPr id="5" name="TextBox 4"/>
-          <p:cNvSpPr txBox="1"/>
-          <p:nvPr/>
-        </p:nvSpPr>
-        <p:spPr>
-          <a:xfrm>
-            <a:off x="457200" y="6446520"/>
-            <a:ext cx="11247120" cy="320040"/>
-          </a:xfrm>
-          <a:prstGeom prst="rect">
-            <a:avLst/>
-          </a:prstGeom>
-          <a:noFill/>
-        </p:spPr>
-        <p:txBody>
-          <a:bodyPr wrap="square" anchor="t">
-            <a:spAutoFit/>
-          </a:bodyPr>
-          <a:lstStyle/>
-          <a:p>
-            <a:pPr algn="l">
-              <a:lnSpc>
                 <a:spcPct val="100000"/>
               </a:lnSpc>
               <a:spcAft>
@@ -16851,13 +17303,13 @@
               </a:spcAft>
             </a:pPr>
             <a:r>
-              <a:rPr sz="1000" b="0" i="0">
-                <a:solidFill>
-                  <a:srgbClr val="555555"/>
-                </a:solidFill>
-                <a:latin typeface="Calibri"/>
-              </a:rPr>
-              <a:t>Day 2 · Conduct</a:t>
+              <a:rPr sz="1800" b="0" i="0">
+                <a:solidFill>
+                  <a:srgbClr val="DDEEFF"/>
+                </a:solidFill>
+                <a:latin typeface="Calibri"/>
+              </a:rPr>
+              <a:t>Multi-sided, data-rich, fast-moving. New measurement problems, familiar theories of harm.</a:t>
             </a:r>
           </a:p>
         </p:txBody>
@@ -16961,7 +17413,7 @@
                 </a:solidFill>
                 <a:latin typeface="Calibri"/>
               </a:rPr>
-              <a:t>Market power at a zero price</a:t>
+              <a:t>What makes platforms different</a:t>
             </a:r>
           </a:p>
         </p:txBody>
@@ -17003,7 +17455,7 @@
                 </a:solidFill>
                 <a:latin typeface="Calibri"/>
               </a:rPr>
-              <a:t>•  A free service can still wield power — over the paying side (advertisers) and over quality to users.</a:t>
+              <a:t>•  Multi-sided: value on one side depends on the other (buyers/sellers, users/advertisers, riders/drivers).</a:t>
             </a:r>
           </a:p>
           <a:p>
@@ -17022,7 +17474,7 @@
                 </a:solidFill>
                 <a:latin typeface="Calibri"/>
               </a:rPr>
-              <a:t>•  SSNDQ replaces SSNIP: would a hypothetical monopolist profitably impose a small but significant decrease in quality (more ads, more data extraction, worse defaults)?</a:t>
+              <a:t>•  Network effects — direct (more users -&gt; more value to users), indirect (more users -&gt; more sellers), and data network effects (more use -&gt; better product).</a:t>
             </a:r>
           </a:p>
           <a:p>
@@ -17041,7 +17493,7 @@
                 </a:solidFill>
                 <a:latin typeface="Calibri"/>
               </a:rPr>
-              <a:t>•  Gatekeeper power: the platform controls a bottleneck between two sides — users can't reach sellers, or sellers can't reach users, except through it.</a:t>
+              <a:t>•  Switching costs and lock-in keep users put even when a rival is better.</a:t>
             </a:r>
           </a:p>
           <a:p>
@@ -17060,7 +17512,26 @@
                 </a:solidFill>
                 <a:latin typeface="Calibri"/>
               </a:rPr>
-              <a:t>•  Measure power by the other side's terms (commission rates, ad load) and by dependence (what share of a seller's sales runs through the platform) — not by the user-side price of zero.</a:t>
+              <a:t>•  Together these tip markets toward winner-take-all and durable, hard-to-contest positions ('gatekeeper' power).</a:t>
+            </a:r>
+          </a:p>
+          <a:p>
+            <a:pPr algn="l">
+              <a:lnSpc>
+                <a:spcPct val="105000"/>
+              </a:lnSpc>
+              <a:spcAft>
+                <a:spcPts val="900"/>
+              </a:spcAft>
+            </a:pPr>
+            <a:r>
+              <a:rPr sz="2000" b="0" i="0">
+                <a:solidFill>
+                  <a:srgbClr val="222222"/>
+                </a:solidFill>
+                <a:latin typeface="Calibri"/>
+              </a:rPr>
+              <a:t>•  Implication: a high share can be both a sign of quality AND a barrier — the analysis has to separate the two.</a:t>
             </a:r>
           </a:p>
         </p:txBody>
@@ -17404,7 +17875,7 @@
             <a:avLst/>
           </a:prstGeom>
           <a:solidFill>
-            <a:srgbClr val="E69F00"/>
+            <a:srgbClr val="0072B2"/>
           </a:solidFill>
           <a:ln>
             <a:noFill/>
@@ -17470,7 +17941,7 @@
                 </a:solidFill>
                 <a:latin typeface="Calibri"/>
               </a:rPr>
-              <a:t>Measuring self-preferencing and default effects</a:t>
+              <a:t>...and what doesn't (familiar theories of harm)</a:t>
             </a:r>
           </a:p>
         </p:txBody>
@@ -17484,7 +17955,7 @@
         <p:spPr>
           <a:xfrm>
             <a:off x="548640" y="1188720"/>
-            <a:ext cx="11064240" cy="822960"/>
+            <a:ext cx="11064240" cy="5029200"/>
           </a:xfrm>
           <a:prstGeom prst="rect">
             <a:avLst/>
@@ -17502,166 +17973,36 @@
                 <a:spcPct val="105000"/>
               </a:lnSpc>
               <a:spcAft>
-                <a:spcPts val="600"/>
-              </a:spcAft>
-            </a:pPr>
-            <a:r>
-              <a:rPr sz="1800" b="0" i="0">
+                <a:spcPts val="900"/>
+              </a:spcAft>
+            </a:pPr>
+            <a:r>
+              <a:rPr sz="2000" b="0" i="0">
                 <a:solidFill>
                   <a:srgbClr val="222222"/>
                 </a:solidFill>
                 <a:latin typeface="Calibri"/>
               </a:rPr>
-              <a:t>Two workhorse measurements:</a:t>
-            </a:r>
-          </a:p>
-        </p:txBody>
-      </p:sp>
-      <p:sp>
-        <p:nvSpPr>
-          <p:cNvPr id="5" name="Rectangle 4"/>
-          <p:cNvSpPr/>
-          <p:nvPr/>
-        </p:nvSpPr>
-        <p:spPr>
-          <a:xfrm>
-            <a:off x="1097280" y="2240280"/>
-            <a:ext cx="9966960" cy="1371600"/>
-          </a:xfrm>
-          <a:prstGeom prst="rect">
-            <a:avLst/>
-          </a:prstGeom>
-          <a:solidFill>
-            <a:srgbClr val="F2F2F2"/>
-          </a:solidFill>
-          <a:ln w="12700">
-            <a:solidFill>
-              <a:srgbClr val="E69F00"/>
-            </a:solidFill>
-          </a:ln>
-          <a:effectLst/>
-        </p:spPr>
-        <p:style>
-          <a:lnRef idx="1">
-            <a:schemeClr val="accent1"/>
-          </a:lnRef>
-          <a:fillRef idx="3">
-            <a:schemeClr val="accent1"/>
-          </a:fillRef>
-          <a:effectRef idx="2">
-            <a:schemeClr val="accent1"/>
-          </a:effectRef>
-          <a:fontRef idx="minor">
-            <a:schemeClr val="lt1"/>
-          </a:fontRef>
-        </p:style>
-        <p:txBody>
-          <a:bodyPr rtlCol="0" anchor="ctr"/>
-          <a:lstStyle/>
-          <a:p>
-            <a:pPr algn="ctr"/>
-          </a:p>
-        </p:txBody>
-      </p:sp>
-      <p:sp>
-        <p:nvSpPr>
-          <p:cNvPr id="6" name="TextBox 5"/>
-          <p:cNvSpPr txBox="1"/>
-          <p:nvPr/>
-        </p:nvSpPr>
-        <p:spPr>
-          <a:xfrm>
-            <a:off x="1280160" y="2377440"/>
-            <a:ext cx="9601200" cy="1097280"/>
-          </a:xfrm>
-          <a:prstGeom prst="rect">
-            <a:avLst/>
-          </a:prstGeom>
-          <a:noFill/>
-        </p:spPr>
-        <p:txBody>
-          <a:bodyPr wrap="square" anchor="ctr">
-            <a:spAutoFit/>
-          </a:bodyPr>
-          <a:lstStyle/>
-          <a:p>
-            <a:pPr algn="ctr">
-              <a:lnSpc>
-                <a:spcPct val="110000"/>
-              </a:lnSpc>
-              <a:spcAft>
-                <a:spcPts val="600"/>
-              </a:spcAft>
-            </a:pPr>
-            <a:r>
-              <a:rPr sz="2400" b="1" i="0">
-                <a:solidFill>
-                  <a:srgbClr val="0072B2"/>
-                </a:solidFill>
-                <a:latin typeface="Consolas"/>
-              </a:rPr>
-              <a:t>Ranking harm:  Δclicks = (CTR_top − CTR_demoted) × queries</a:t>
-            </a:r>
-          </a:p>
-          <a:p>
-            <a:pPr algn="ctr">
-              <a:lnSpc>
-                <a:spcPct val="110000"/>
-              </a:lnSpc>
-              <a:spcAft>
-                <a:spcPts val="600"/>
-              </a:spcAft>
-            </a:pPr>
-            <a:r>
-              <a:rPr sz="2400" b="1" i="0">
-                <a:solidFill>
-                  <a:srgbClr val="0072B2"/>
-                </a:solidFill>
-                <a:latin typeface="Consolas"/>
-              </a:rPr>
-              <a:t>Default effect: event-study / DiD around a choice-screen change</a:t>
-            </a:r>
-          </a:p>
-        </p:txBody>
-      </p:sp>
-      <p:sp>
-        <p:nvSpPr>
-          <p:cNvPr id="7" name="TextBox 6"/>
-          <p:cNvSpPr txBox="1"/>
-          <p:nvPr/>
-        </p:nvSpPr>
-        <p:spPr>
-          <a:xfrm>
-            <a:off x="548640" y="3931920"/>
-            <a:ext cx="11064240" cy="2194560"/>
-          </a:xfrm>
-          <a:prstGeom prst="rect">
-            <a:avLst/>
-          </a:prstGeom>
-          <a:noFill/>
-        </p:spPr>
-        <p:txBody>
-          <a:bodyPr wrap="square" anchor="t">
-            <a:spAutoFit/>
-          </a:bodyPr>
-          <a:lstStyle/>
+              <a:t>•  The conduct is old friends in new clothes: self-preferencing (leverage/discrimination), exclusion via defaults, tying/bundling, refusal to interoperate.</a:t>
+            </a:r>
+          </a:p>
           <a:p>
             <a:pPr algn="l">
               <a:lnSpc>
                 <a:spcPct val="105000"/>
               </a:lnSpc>
               <a:spcAft>
-                <a:spcPts val="800"/>
-              </a:spcAft>
-            </a:pPr>
-            <a:r>
-              <a:rPr sz="1700" b="0" i="0">
+                <a:spcPts val="900"/>
+              </a:spcAft>
+            </a:pPr>
+            <a:r>
+              <a:rPr sz="2000" b="0" i="0">
                 <a:solidFill>
                   <a:srgbClr val="222222"/>
                 </a:solidFill>
                 <a:latin typeface="Calibri"/>
               </a:rPr>
-              <a:t>•  Top organic result captures ~25–35% of clicks; demotion to position ~4 is a large traffic loss even at equal quality.</a:t>
+              <a:t>•  Zero price on one side breaks the SSNIP — use SSNDQ (small but significant DECREASE in quality: ad load, data extraction, degraded service) and watch the OTHER side's price.</a:t>
             </a:r>
           </a:p>
           <a:p>
@@ -17670,17 +18011,17 @@
                 <a:spcPct val="105000"/>
               </a:lnSpc>
               <a:spcAft>
-                <a:spcPts val="800"/>
-              </a:spcAft>
-            </a:pPr>
-            <a:r>
-              <a:rPr sz="1700" b="0" i="0">
+                <a:spcPts val="900"/>
+              </a:spcAft>
+            </a:pPr>
+            <a:r>
+              <a:rPr sz="2000" b="0" i="0">
                 <a:solidFill>
                   <a:srgbClr val="222222"/>
                 </a:solidFill>
                 <a:latin typeface="Calibri"/>
               </a:rPr>
-              <a:t>•  Self-preferencing test: regress rank (or visibility) on quality AND an own-product dummy — the dummy coefficient is the favouritism, net of quality.</a:t>
+              <a:t>•  Defaults move behaviour even when switching is nominally free — the central empirical fact of the search cases.</a:t>
             </a:r>
           </a:p>
           <a:p>
@@ -17689,43 +18030,24 @@
                 <a:spcPct val="105000"/>
               </a:lnSpc>
               <a:spcAft>
-                <a:spcPts val="800"/>
-              </a:spcAft>
-            </a:pPr>
-            <a:r>
-              <a:rPr sz="1700" b="0" i="0">
+                <a:spcPts val="900"/>
+              </a:spcAft>
+            </a:pPr>
+            <a:r>
+              <a:rPr sz="2000" b="0" i="0">
                 <a:solidFill>
                   <a:srgbClr val="222222"/>
                 </a:solidFill>
                 <a:latin typeface="Calibri"/>
               </a:rPr>
-              <a:t>•  Defaults: a DiD around the introduction/removal of a choice screen isolates how much share moves when the default changes.</a:t>
-            </a:r>
-          </a:p>
-          <a:p>
-            <a:pPr algn="l">
-              <a:lnSpc>
-                <a:spcPct val="105000"/>
-              </a:lnSpc>
-              <a:spcAft>
-                <a:spcPts val="800"/>
-              </a:spcAft>
-            </a:pPr>
-            <a:r>
-              <a:rPr sz="1700" b="0" i="0">
-                <a:solidFill>
-                  <a:srgbClr val="222222"/>
-                </a:solidFill>
-                <a:latin typeface="Calibri"/>
-              </a:rPr>
-              <a:t>•  These are the same regression and DiD tools from Module 2.2, pointed at clicks and shares.</a:t>
-            </a:r>
-          </a:p>
-        </p:txBody>
-      </p:sp>
-      <p:sp>
-        <p:nvSpPr>
-          <p:cNvPr id="8" name="TextBox 7"/>
+              <a:t>•  So the toolkit transfers: define the market (carefully, around zero prices), measure foreclosure / favouritism, weigh justifications.</a:t>
+            </a:r>
+          </a:p>
+        </p:txBody>
+      </p:sp>
+      <p:sp>
+        <p:nvSpPr>
+          <p:cNvPr id="5" name="TextBox 4"/>
           <p:cNvSpPr txBox="1"/>
           <p:nvPr/>
         </p:nvSpPr>
@@ -17864,7 +18186,7 @@
                 </a:solidFill>
                 <a:latin typeface="Calibri"/>
               </a:rPr>
-              <a:t>The enforcement record is now 2024–2026 — US</a:t>
+              <a:t>Market power at a zero price</a:t>
             </a:r>
           </a:p>
         </p:txBody>
@@ -17906,7 +18228,7 @@
                 </a:solidFill>
                 <a:latin typeface="Calibri"/>
               </a:rPr>
-              <a:t>•  US v. Google (search): liability Aug 2024; remedies Sept 2025 — default-exclusivity bans and data-sharing, NO Chrome divestiture.</a:t>
+              <a:t>•  A free service can still wield power — over the paying side (advertisers) and over quality to users.</a:t>
             </a:r>
           </a:p>
           <a:p>
@@ -17925,7 +18247,7 @@
                 </a:solidFill>
                 <a:latin typeface="Calibri"/>
               </a:rPr>
-              <a:t>•  US v. Google (ad tech): §2 liability (2025) — publisher ad server + ad exchange.</a:t>
+              <a:t>•  SSNDQ replaces SSNIP: would a hypothetical monopolist profitably impose a small but significant decrease in quality (more ads, more data extraction, worse defaults)?</a:t>
             </a:r>
           </a:p>
           <a:p>
@@ -17944,7 +18266,7 @@
                 </a:solidFill>
                 <a:latin typeface="Calibri"/>
               </a:rPr>
-              <a:t>•  Epic v. Apple: 2025 contempt ruling barred Apple's 27% off-app surcharge and anti-steering 'scare screens'.</a:t>
+              <a:t>•  Gatekeeper power: the platform controls a bottleneck between two sides — users can't reach sellers, or sellers can't reach users, except through it.</a:t>
             </a:r>
           </a:p>
           <a:p>
@@ -17963,7 +18285,7 @@
                 </a:solidFill>
                 <a:latin typeface="Calibri"/>
               </a:rPr>
-              <a:t>•  The US model is case-by-case litigation — slow, fact-intensive, remedy fights that run for years after liability.</a:t>
+              <a:t>•  Measure power by the other side's terms (commission rates, ad load) and by dependence (what share of a seller's sales runs through the platform) — not by the user-side price of zero.</a:t>
             </a:r>
           </a:p>
         </p:txBody>
@@ -18043,7 +18365,7 @@
             <a:avLst/>
           </a:prstGeom>
           <a:solidFill>
-            <a:srgbClr val="0072B2"/>
+            <a:srgbClr val="E69F00"/>
           </a:solidFill>
           <a:ln>
             <a:noFill/>
@@ -18109,7 +18431,7 @@
                 </a:solidFill>
                 <a:latin typeface="Calibri"/>
               </a:rPr>
-              <a:t>The enforcement record — EU &amp; SA</a:t>
+              <a:t>Measuring self-preferencing and default effects</a:t>
             </a:r>
           </a:p>
         </p:txBody>
@@ -18123,7 +18445,7 @@
         <p:spPr>
           <a:xfrm>
             <a:off x="548640" y="1188720"/>
-            <a:ext cx="11064240" cy="5029200"/>
+            <a:ext cx="11064240" cy="822960"/>
           </a:xfrm>
           <a:prstGeom prst="rect">
             <a:avLst/>
@@ -18141,36 +18463,166 @@
                 <a:spcPct val="105000"/>
               </a:lnSpc>
               <a:spcAft>
-                <a:spcPts val="900"/>
-              </a:spcAft>
-            </a:pPr>
-            <a:r>
-              <a:rPr sz="2000" b="0" i="0">
+                <a:spcPts val="600"/>
+              </a:spcAft>
+            </a:pPr>
+            <a:r>
+              <a:rPr sz="1800" b="0" i="0">
                 <a:solidFill>
                   <a:srgbClr val="222222"/>
                 </a:solidFill>
                 <a:latin typeface="Calibri"/>
               </a:rPr>
-              <a:t>•  EU Google Shopping: self-preferencing finding affirmed (CJEU 2024) — the European anchor for ranking-discrimination harm.</a:t>
-            </a:r>
-          </a:p>
+              <a:t>Two workhorse measurements:</a:t>
+            </a:r>
+          </a:p>
+        </p:txBody>
+      </p:sp>
+      <p:sp>
+        <p:nvSpPr>
+          <p:cNvPr id="5" name="Rectangle 4"/>
+          <p:cNvSpPr/>
+          <p:nvPr/>
+        </p:nvSpPr>
+        <p:spPr>
+          <a:xfrm>
+            <a:off x="1097280" y="2240280"/>
+            <a:ext cx="9966960" cy="1371600"/>
+          </a:xfrm>
+          <a:prstGeom prst="rect">
+            <a:avLst/>
+          </a:prstGeom>
+          <a:solidFill>
+            <a:srgbClr val="F2F2F2"/>
+          </a:solidFill>
+          <a:ln w="12700">
+            <a:solidFill>
+              <a:srgbClr val="E69F00"/>
+            </a:solidFill>
+          </a:ln>
+          <a:effectLst/>
+        </p:spPr>
+        <p:style>
+          <a:lnRef idx="1">
+            <a:schemeClr val="accent1"/>
+          </a:lnRef>
+          <a:fillRef idx="3">
+            <a:schemeClr val="accent1"/>
+          </a:fillRef>
+          <a:effectRef idx="2">
+            <a:schemeClr val="accent1"/>
+          </a:effectRef>
+          <a:fontRef idx="minor">
+            <a:schemeClr val="lt1"/>
+          </a:fontRef>
+        </p:style>
+        <p:txBody>
+          <a:bodyPr rtlCol="0" anchor="ctr"/>
+          <a:lstStyle/>
+          <a:p>
+            <a:pPr algn="ctr"/>
+          </a:p>
+        </p:txBody>
+      </p:sp>
+      <p:sp>
+        <p:nvSpPr>
+          <p:cNvPr id="6" name="TextBox 5"/>
+          <p:cNvSpPr txBox="1"/>
+          <p:nvPr/>
+        </p:nvSpPr>
+        <p:spPr>
+          <a:xfrm>
+            <a:off x="1280160" y="2377440"/>
+            <a:ext cx="9601200" cy="1097280"/>
+          </a:xfrm>
+          <a:prstGeom prst="rect">
+            <a:avLst/>
+          </a:prstGeom>
+          <a:noFill/>
+        </p:spPr>
+        <p:txBody>
+          <a:bodyPr wrap="square" anchor="ctr">
+            <a:spAutoFit/>
+          </a:bodyPr>
+          <a:lstStyle/>
+          <a:p>
+            <a:pPr algn="ctr">
+              <a:lnSpc>
+                <a:spcPct val="110000"/>
+              </a:lnSpc>
+              <a:spcAft>
+                <a:spcPts val="600"/>
+              </a:spcAft>
+            </a:pPr>
+            <a:r>
+              <a:rPr sz="2400" b="1" i="0">
+                <a:solidFill>
+                  <a:srgbClr val="0072B2"/>
+                </a:solidFill>
+                <a:latin typeface="Consolas"/>
+              </a:rPr>
+              <a:t>Ranking harm:  Δclicks = (CTR_top − CTR_demoted) × queries</a:t>
+            </a:r>
+          </a:p>
+          <a:p>
+            <a:pPr algn="ctr">
+              <a:lnSpc>
+                <a:spcPct val="110000"/>
+              </a:lnSpc>
+              <a:spcAft>
+                <a:spcPts val="600"/>
+              </a:spcAft>
+            </a:pPr>
+            <a:r>
+              <a:rPr sz="2400" b="1" i="0">
+                <a:solidFill>
+                  <a:srgbClr val="0072B2"/>
+                </a:solidFill>
+                <a:latin typeface="Consolas"/>
+              </a:rPr>
+              <a:t>Default effect: event-study / DiD around a choice-screen change</a:t>
+            </a:r>
+          </a:p>
+        </p:txBody>
+      </p:sp>
+      <p:sp>
+        <p:nvSpPr>
+          <p:cNvPr id="7" name="TextBox 6"/>
+          <p:cNvSpPr txBox="1"/>
+          <p:nvPr/>
+        </p:nvSpPr>
+        <p:spPr>
+          <a:xfrm>
+            <a:off x="548640" y="3931920"/>
+            <a:ext cx="11064240" cy="2194560"/>
+          </a:xfrm>
+          <a:prstGeom prst="rect">
+            <a:avLst/>
+          </a:prstGeom>
+          <a:noFill/>
+        </p:spPr>
+        <p:txBody>
+          <a:bodyPr wrap="square" anchor="t">
+            <a:spAutoFit/>
+          </a:bodyPr>
+          <a:lstStyle/>
           <a:p>
             <a:pPr algn="l">
               <a:lnSpc>
                 <a:spcPct val="105000"/>
               </a:lnSpc>
               <a:spcAft>
-                <a:spcPts val="900"/>
-              </a:spcAft>
-            </a:pPr>
-            <a:r>
-              <a:rPr sz="2000" b="0" i="0">
+                <a:spcPts val="800"/>
+              </a:spcAft>
+            </a:pPr>
+            <a:r>
+              <a:rPr sz="1700" b="0" i="0">
                 <a:solidFill>
                   <a:srgbClr val="222222"/>
                 </a:solidFill>
                 <a:latin typeface="Calibri"/>
               </a:rPr>
-              <a:t>•  DMA (ex ante gatekeeper rules): non-compliance fines — Apple €500M, Meta €200M (Apr 2025). Rules apply before harm is proven.</a:t>
+              <a:t>•  Top organic result captures ~25–35% of clicks; demotion to position ~4 is a large traffic loss even at equal quality.</a:t>
             </a:r>
           </a:p>
           <a:p>
@@ -18179,17 +18631,17 @@
                 <a:spcPct val="105000"/>
               </a:lnSpc>
               <a:spcAft>
-                <a:spcPts val="900"/>
-              </a:spcAft>
-            </a:pPr>
-            <a:r>
-              <a:rPr sz="2000" b="0" i="0">
+                <a:spcPts val="800"/>
+              </a:spcAft>
+            </a:pPr>
+            <a:r>
+              <a:rPr sz="1700" b="0" i="0">
                 <a:solidFill>
                   <a:srgbClr val="222222"/>
                 </a:solidFill>
                 <a:latin typeface="Calibri"/>
               </a:rPr>
-              <a:t>•  SA — OIPMI final report (2023): Takealot marketplace ranking vs its own retail arm, food-delivery commissions ~25–30%, Google &gt;90% SA search share.</a:t>
+              <a:t>•  Self-preferencing test: regress rank (or visibility) on quality AND an own-product dummy — the dummy coefficient is the favouritism, net of quality.</a:t>
             </a:r>
           </a:p>
           <a:p>
@@ -18198,24 +18650,43 @@
                 <a:spcPct val="105000"/>
               </a:lnSpc>
               <a:spcAft>
-                <a:spcPts val="900"/>
-              </a:spcAft>
-            </a:pPr>
-            <a:r>
-              <a:rPr sz="2000" b="0" i="0">
+                <a:spcPts val="800"/>
+              </a:spcAft>
+            </a:pPr>
+            <a:r>
+              <a:rPr sz="1700" b="0" i="0">
                 <a:solidFill>
                   <a:srgbClr val="222222"/>
                 </a:solidFill>
                 <a:latin typeface="Calibri"/>
               </a:rPr>
-              <a:t>•  OIPMI remedies: fair-ranking reporting, anti-steering relief, data/visibility transparency — a forward-looking remedy package, not a litigated abuse finding.</a:t>
-            </a:r>
-          </a:p>
-        </p:txBody>
-      </p:sp>
-      <p:sp>
-        <p:nvSpPr>
-          <p:cNvPr id="5" name="TextBox 4"/>
+              <a:t>•  Defaults: a DiD around the introduction/removal of a choice screen isolates how much share moves when the default changes.</a:t>
+            </a:r>
+          </a:p>
+          <a:p>
+            <a:pPr algn="l">
+              <a:lnSpc>
+                <a:spcPct val="105000"/>
+              </a:lnSpc>
+              <a:spcAft>
+                <a:spcPts val="800"/>
+              </a:spcAft>
+            </a:pPr>
+            <a:r>
+              <a:rPr sz="1700" b="0" i="0">
+                <a:solidFill>
+                  <a:srgbClr val="222222"/>
+                </a:solidFill>
+                <a:latin typeface="Calibri"/>
+              </a:rPr>
+              <a:t>•  These are the same regression and DiD tools from Module 2.2, pointed at clicks and shares.</a:t>
+            </a:r>
+          </a:p>
+        </p:txBody>
+      </p:sp>
+      <p:sp>
+        <p:nvSpPr>
+          <p:cNvPr id="8" name="TextBox 7"/>
           <p:cNvSpPr txBox="1"/>
           <p:nvPr/>
         </p:nvSpPr>
@@ -18354,7 +18825,7 @@
                 </a:solidFill>
                 <a:latin typeface="Calibri"/>
               </a:rPr>
-              <a:t>Three models, side by side</a:t>
+              <a:t>The enforcement record is now 2024–2026 — US</a:t>
             </a:r>
           </a:p>
         </p:txBody>
@@ -18396,7 +18867,7 @@
                 </a:solidFill>
                 <a:latin typeface="Calibri"/>
               </a:rPr>
-              <a:t>•  SA — market inquiries: investigative, forward-looking remedies, fast for moving markets; reaches harms without a contested abuse finding.</a:t>
+              <a:t>•  US v. Google (search): liability Aug 2024; remedies Sept 2025 — default-exclusivity bans and data-sharing, NO Chrome divestiture.</a:t>
             </a:r>
           </a:p>
           <a:p>
@@ -18415,7 +18886,7 @@
                 </a:solidFill>
                 <a:latin typeface="Calibri"/>
               </a:rPr>
-              <a:t>•  EU — DMA: ex ante obligations on designated gatekeepers; harm presumed from the structure, enforced by fines.</a:t>
+              <a:t>•  US v. Google (ad tech): §2 liability (2025) — publisher ad server + ad exchange.</a:t>
             </a:r>
           </a:p>
           <a:p>
@@ -18434,7 +18905,7 @@
                 </a:solidFill>
                 <a:latin typeface="Calibri"/>
               </a:rPr>
-              <a:t>•  US — litigation: ex post case-by-case under Sherman §2; high proof burden, long remedy phase.</a:t>
+              <a:t>•  Epic v. Apple: 2025 contempt ruling barred Apple's 27% off-app surcharge and anti-steering 'scare screens'.</a:t>
             </a:r>
           </a:p>
           <a:p>
@@ -18453,7 +18924,7 @@
                 </a:solidFill>
                 <a:latin typeface="Calibri"/>
               </a:rPr>
-              <a:t>•  For the expert: the measurement is the same (ranking, defaults, foreclosure); what differs is what you must prove and when — frame your number to the forum.</a:t>
+              <a:t>•  The US model is case-by-case litigation — slow, fact-intensive, remedy fights that run for years after liability.</a:t>
             </a:r>
           </a:p>
         </p:txBody>
@@ -18533,7 +19004,7 @@
             <a:avLst/>
           </a:prstGeom>
           <a:solidFill>
-            <a:srgbClr val="009E73"/>
+            <a:srgbClr val="0072B2"/>
           </a:solidFill>
           <a:ln>
             <a:noFill/>
@@ -18599,338 +19070,113 @@
                 </a:solidFill>
                 <a:latin typeface="Calibri"/>
               </a:rPr>
-              <a:t>Online Intermediation Platforms Market Inquiry (OIPMI)</a:t>
-            </a:r>
-          </a:p>
-        </p:txBody>
-      </p:sp>
-      <p:sp>
-        <p:nvSpPr>
-          <p:cNvPr id="4" name="Rectangle 3"/>
-          <p:cNvSpPr/>
+              <a:t>The enforcement record — EU &amp; SA</a:t>
+            </a:r>
+          </a:p>
+        </p:txBody>
+      </p:sp>
+      <p:sp>
+        <p:nvSpPr>
+          <p:cNvPr id="4" name="TextBox 3"/>
+          <p:cNvSpPr txBox="1"/>
           <p:nvPr/>
         </p:nvSpPr>
         <p:spPr>
           <a:xfrm>
             <a:off x="548640" y="1188720"/>
-            <a:ext cx="1463040" cy="457200"/>
-          </a:xfrm>
-          <a:prstGeom prst="rect">
-            <a:avLst/>
-          </a:prstGeom>
-          <a:solidFill>
-            <a:srgbClr val="009E73"/>
-          </a:solidFill>
-          <a:ln>
-            <a:noFill/>
-          </a:ln>
-          <a:effectLst/>
-        </p:spPr>
-        <p:style>
-          <a:lnRef idx="1">
-            <a:schemeClr val="accent1"/>
-          </a:lnRef>
-          <a:fillRef idx="3">
-            <a:schemeClr val="accent1"/>
-          </a:fillRef>
-          <a:effectRef idx="2">
-            <a:schemeClr val="accent1"/>
-          </a:effectRef>
-          <a:fontRef idx="minor">
-            <a:schemeClr val="lt1"/>
-          </a:fontRef>
-        </p:style>
-        <p:txBody>
-          <a:bodyPr rtlCol="0" anchor="ctr"/>
-          <a:lstStyle/>
-          <a:p>
-            <a:pPr algn="ctr"/>
+            <a:ext cx="11064240" cy="5029200"/>
+          </a:xfrm>
+          <a:prstGeom prst="rect">
+            <a:avLst/>
+          </a:prstGeom>
+          <a:noFill/>
+        </p:spPr>
+        <p:txBody>
+          <a:bodyPr wrap="square" anchor="t">
+            <a:spAutoFit/>
+          </a:bodyPr>
+          <a:lstStyle/>
+          <a:p>
+            <a:pPr algn="l">
+              <a:lnSpc>
+                <a:spcPct val="105000"/>
+              </a:lnSpc>
+              <a:spcAft>
+                <a:spcPts val="900"/>
+              </a:spcAft>
+            </a:pPr>
+            <a:r>
+              <a:rPr sz="2000" b="0" i="0">
+                <a:solidFill>
+                  <a:srgbClr val="222222"/>
+                </a:solidFill>
+                <a:latin typeface="Calibri"/>
+              </a:rPr>
+              <a:t>•  EU Google Shopping: self-preferencing finding affirmed (CJEU 2024) — the European anchor for ranking-discrimination harm.</a:t>
+            </a:r>
+          </a:p>
+          <a:p>
+            <a:pPr algn="l">
+              <a:lnSpc>
+                <a:spcPct val="105000"/>
+              </a:lnSpc>
+              <a:spcAft>
+                <a:spcPts val="900"/>
+              </a:spcAft>
+            </a:pPr>
+            <a:r>
+              <a:rPr sz="2000" b="0" i="0">
+                <a:solidFill>
+                  <a:srgbClr val="222222"/>
+                </a:solidFill>
+                <a:latin typeface="Calibri"/>
+              </a:rPr>
+              <a:t>•  DMA (ex ante gatekeeper rules): non-compliance fines — Apple €500M, Meta €200M (Apr 2025). Rules apply before harm is proven.</a:t>
+            </a:r>
+          </a:p>
+          <a:p>
+            <a:pPr algn="l">
+              <a:lnSpc>
+                <a:spcPct val="105000"/>
+              </a:lnSpc>
+              <a:spcAft>
+                <a:spcPts val="900"/>
+              </a:spcAft>
+            </a:pPr>
+            <a:r>
+              <a:rPr sz="2000" b="0" i="0">
+                <a:solidFill>
+                  <a:srgbClr val="222222"/>
+                </a:solidFill>
+                <a:latin typeface="Calibri"/>
+              </a:rPr>
+              <a:t>•  SA — OIPMI final report (2023): Takealot marketplace ranking vs its own retail arm, food-delivery commissions ~25–30%, Google &gt;90% SA search share.</a:t>
+            </a:r>
+          </a:p>
+          <a:p>
+            <a:pPr algn="l">
+              <a:lnSpc>
+                <a:spcPct val="105000"/>
+              </a:lnSpc>
+              <a:spcAft>
+                <a:spcPts val="900"/>
+              </a:spcAft>
+            </a:pPr>
+            <a:r>
+              <a:rPr sz="2000" b="0" i="0">
+                <a:solidFill>
+                  <a:srgbClr val="222222"/>
+                </a:solidFill>
+                <a:latin typeface="Calibri"/>
+              </a:rPr>
+              <a:t>•  OIPMI remedies: fair-ranking reporting, anti-steering relief, data/visibility transparency — a forward-looking remedy package, not a litigated abuse finding.</a:t>
+            </a:r>
           </a:p>
         </p:txBody>
       </p:sp>
       <p:sp>
         <p:nvSpPr>
           <p:cNvPr id="5" name="TextBox 4"/>
-          <p:cNvSpPr txBox="1"/>
-          <p:nvPr/>
-        </p:nvSpPr>
-        <p:spPr>
-          <a:xfrm>
-            <a:off x="548640" y="1207008"/>
-            <a:ext cx="1463040" cy="420624"/>
-          </a:xfrm>
-          <a:prstGeom prst="rect">
-            <a:avLst/>
-          </a:prstGeom>
-          <a:noFill/>
-        </p:spPr>
-        <p:txBody>
-          <a:bodyPr wrap="square" anchor="ctr">
-            <a:spAutoFit/>
-          </a:bodyPr>
-          <a:lstStyle/>
-          <a:p>
-            <a:pPr algn="ctr">
-              <a:lnSpc>
-                <a:spcPct val="100000"/>
-              </a:lnSpc>
-              <a:spcAft>
-                <a:spcPts val="600"/>
-              </a:spcAft>
-            </a:pPr>
-            <a:r>
-              <a:rPr sz="1800" b="1" i="0">
-                <a:solidFill>
-                  <a:srgbClr val="FFFFFF"/>
-                </a:solidFill>
-                <a:latin typeface="Calibri"/>
-              </a:rPr>
-              <a:t>SA</a:t>
-            </a:r>
-          </a:p>
-        </p:txBody>
-      </p:sp>
-      <p:sp>
-        <p:nvSpPr>
-          <p:cNvPr id="6" name="TextBox 5"/>
-          <p:cNvSpPr txBox="1"/>
-          <p:nvPr/>
-        </p:nvSpPr>
-        <p:spPr>
-          <a:xfrm>
-            <a:off x="2194560" y="1188720"/>
-            <a:ext cx="9418320" cy="548640"/>
-          </a:xfrm>
-          <a:prstGeom prst="rect">
-            <a:avLst/>
-          </a:prstGeom>
-          <a:noFill/>
-        </p:spPr>
-        <p:txBody>
-          <a:bodyPr wrap="square" anchor="ctr">
-            <a:spAutoFit/>
-          </a:bodyPr>
-          <a:lstStyle/>
-          <a:p>
-            <a:pPr algn="l">
-              <a:lnSpc>
-                <a:spcPct val="100000"/>
-              </a:lnSpc>
-              <a:spcAft>
-                <a:spcPts val="600"/>
-              </a:spcAft>
-            </a:pPr>
-            <a:r>
-              <a:rPr sz="1800" b="1" i="0">
-                <a:solidFill>
-                  <a:srgbClr val="009E73"/>
-                </a:solidFill>
-                <a:latin typeface="Calibri"/>
-              </a:rPr>
-              <a:t>Self-preferencing and platform dependence, SA-style remedies</a:t>
-            </a:r>
-          </a:p>
-        </p:txBody>
-      </p:sp>
-      <p:sp>
-        <p:nvSpPr>
-          <p:cNvPr id="7" name="TextBox 6"/>
-          <p:cNvSpPr txBox="1"/>
-          <p:nvPr/>
-        </p:nvSpPr>
-        <p:spPr>
-          <a:xfrm>
-            <a:off x="548640" y="1920240"/>
-            <a:ext cx="11064240" cy="3108960"/>
-          </a:xfrm>
-          <a:prstGeom prst="rect">
-            <a:avLst/>
-          </a:prstGeom>
-          <a:noFill/>
-        </p:spPr>
-        <p:txBody>
-          <a:bodyPr wrap="square" anchor="t">
-            <a:spAutoFit/>
-          </a:bodyPr>
-          <a:lstStyle/>
-          <a:p>
-            <a:pPr algn="l">
-              <a:lnSpc>
-                <a:spcPct val="104000"/>
-              </a:lnSpc>
-              <a:spcAft>
-                <a:spcPts val="700"/>
-              </a:spcAft>
-            </a:pPr>
-            <a:r>
-              <a:rPr sz="1500" b="1" i="0">
-                <a:solidFill>
-                  <a:srgbClr val="555555"/>
-                </a:solidFill>
-                <a:latin typeface="Calibri"/>
-              </a:rPr>
-              <a:t>Facts &amp; analysis</a:t>
-            </a:r>
-          </a:p>
-          <a:p>
-            <a:pPr algn="l">
-              <a:lnSpc>
-                <a:spcPct val="104000"/>
-              </a:lnSpc>
-              <a:spcAft>
-                <a:spcPts val="700"/>
-              </a:spcAft>
-            </a:pPr>
-            <a:r>
-              <a:rPr sz="1600" b="0" i="0">
-                <a:solidFill>
-                  <a:srgbClr val="222222"/>
-                </a:solidFill>
-                <a:latin typeface="Calibri"/>
-              </a:rPr>
-              <a:t>•  Final report (2023): e-commerce (Takealot marketplace ranking vs. its own retail arm), food delivery (commissions ~25–30%), online travel, and Google's &gt;90% SA search share.</a:t>
-            </a:r>
-          </a:p>
-          <a:p>
-            <a:pPr algn="l">
-              <a:lnSpc>
-                <a:spcPct val="104000"/>
-              </a:lnSpc>
-              <a:spcAft>
-                <a:spcPts val="700"/>
-              </a:spcAft>
-            </a:pPr>
-            <a:r>
-              <a:rPr sz="1600" b="0" i="0">
-                <a:solidFill>
-                  <a:srgbClr val="222222"/>
-                </a:solidFill>
-                <a:latin typeface="Calibri"/>
-              </a:rPr>
-              <a:t>•  Remedies: fair-ranking reporting, anti-steering relief for restaurants, and data/visibility transparency.</a:t>
-            </a:r>
-          </a:p>
-          <a:p>
-            <a:pPr algn="l">
-              <a:lnSpc>
-                <a:spcPct val="104000"/>
-              </a:lnSpc>
-              <a:spcAft>
-                <a:spcPts val="700"/>
-              </a:spcAft>
-            </a:pPr>
-            <a:r>
-              <a:rPr sz="1600" b="0" i="0">
-                <a:solidFill>
-                  <a:srgbClr val="222222"/>
-                </a:solidFill>
-                <a:latin typeface="Calibri"/>
-              </a:rPr>
-              <a:t>•  A market-inquiry remedy package, not a litigated abuse finding — the SA tool of choice for fast-moving digital markets.</a:t>
-            </a:r>
-          </a:p>
-        </p:txBody>
-      </p:sp>
-      <p:sp>
-        <p:nvSpPr>
-          <p:cNvPr id="8" name="Rectangle 7"/>
-          <p:cNvSpPr/>
-          <p:nvPr/>
-        </p:nvSpPr>
-        <p:spPr>
-          <a:xfrm>
-            <a:off x="548640" y="5212080"/>
-            <a:ext cx="11064240" cy="1005840"/>
-          </a:xfrm>
-          <a:prstGeom prst="rect">
-            <a:avLst/>
-          </a:prstGeom>
-          <a:solidFill>
-            <a:srgbClr val="F2F2F2"/>
-          </a:solidFill>
-          <a:ln w="12700">
-            <a:solidFill>
-              <a:srgbClr val="009E73"/>
-            </a:solidFill>
-          </a:ln>
-          <a:effectLst/>
-        </p:spPr>
-        <p:style>
-          <a:lnRef idx="1">
-            <a:schemeClr val="accent1"/>
-          </a:lnRef>
-          <a:fillRef idx="3">
-            <a:schemeClr val="accent1"/>
-          </a:fillRef>
-          <a:effectRef idx="2">
-            <a:schemeClr val="accent1"/>
-          </a:effectRef>
-          <a:fontRef idx="minor">
-            <a:schemeClr val="lt1"/>
-          </a:fontRef>
-        </p:style>
-        <p:txBody>
-          <a:bodyPr rtlCol="0" anchor="ctr"/>
-          <a:lstStyle/>
-          <a:p>
-            <a:pPr algn="ctr"/>
-          </a:p>
-        </p:txBody>
-      </p:sp>
-      <p:sp>
-        <p:nvSpPr>
-          <p:cNvPr id="9" name="TextBox 8"/>
-          <p:cNvSpPr txBox="1"/>
-          <p:nvPr/>
-        </p:nvSpPr>
-        <p:spPr>
-          <a:xfrm>
-            <a:off x="731520" y="5303520"/>
-            <a:ext cx="10698480" cy="868680"/>
-          </a:xfrm>
-          <a:prstGeom prst="rect">
-            <a:avLst/>
-          </a:prstGeom>
-          <a:noFill/>
-        </p:spPr>
-        <p:txBody>
-          <a:bodyPr wrap="square" anchor="ctr">
-            <a:spAutoFit/>
-          </a:bodyPr>
-          <a:lstStyle/>
-          <a:p>
-            <a:pPr algn="l">
-              <a:lnSpc>
-                <a:spcPct val="103000"/>
-              </a:lnSpc>
-              <a:spcAft>
-                <a:spcPts val="600"/>
-              </a:spcAft>
-            </a:pPr>
-            <a:r>
-              <a:rPr sz="1600" b="1" i="0">
-                <a:solidFill>
-                  <a:srgbClr val="009E73"/>
-                </a:solidFill>
-                <a:latin typeface="Calibri"/>
-              </a:rPr>
-              <a:t>Why it matters:  </a:t>
-            </a:r>
-            <a:r>
-              <a:rPr sz="1600" b="0" i="0">
-                <a:solidFill>
-                  <a:srgbClr val="222222"/>
-                </a:solidFill>
-                <a:latin typeface="Calibri"/>
-              </a:rPr>
-              <a:t>SA reaches platform harms through market inquiries with forward-looking remedies, in parallel with the EU's ex ante DMA — both contrast with US case-by-case litigation.</a:t>
-            </a:r>
-          </a:p>
-        </p:txBody>
-      </p:sp>
-      <p:sp>
-        <p:nvSpPr>
-          <p:cNvPr id="10" name="TextBox 9"/>
           <p:cNvSpPr txBox="1"/>
           <p:nvPr/>
         </p:nvSpPr>
@@ -19003,7 +19249,7 @@
             <a:avLst/>
           </a:prstGeom>
           <a:solidFill>
-            <a:srgbClr val="222222"/>
+            <a:srgbClr val="0072B2"/>
           </a:solidFill>
           <a:ln>
             <a:noFill/>
@@ -19069,7 +19315,7 @@
                 </a:solidFill>
                 <a:latin typeface="Calibri"/>
               </a:rPr>
-              <a:t>Day 2 — what you should now be able to do</a:t>
+              <a:t>Three models, side by side</a:t>
             </a:r>
           </a:p>
         </p:txBody>
@@ -19082,8 +19328,8 @@
         </p:nvSpPr>
         <p:spPr>
           <a:xfrm>
-            <a:off x="640080" y="1280160"/>
-            <a:ext cx="10972800" cy="4937760"/>
+            <a:off x="548640" y="1188720"/>
+            <a:ext cx="11064240" cy="5029200"/>
           </a:xfrm>
           <a:prstGeom prst="rect">
             <a:avLst/>
@@ -19098,21 +19344,12 @@
           <a:p>
             <a:pPr algn="l">
               <a:lnSpc>
-                <a:spcPct val="108000"/>
-              </a:lnSpc>
-              <a:spcAft>
-                <a:spcPts val="1400"/>
-              </a:spcAft>
-            </a:pPr>
-            <a:r>
-              <a:rPr sz="2000" b="1" i="0">
-                <a:solidFill>
-                  <a:srgbClr val="E69F00"/>
-                </a:solidFill>
-                <a:latin typeface="Calibri"/>
-              </a:rPr>
-              <a:t>1.  </a:t>
-            </a:r>
+                <a:spcPct val="105000"/>
+              </a:lnSpc>
+              <a:spcAft>
+                <a:spcPts val="900"/>
+              </a:spcAft>
+            </a:pPr>
             <a:r>
               <a:rPr sz="2000" b="0" i="0">
                 <a:solidFill>
@@ -19120,27 +19357,18 @@
                 </a:solidFill>
                 <a:latin typeface="Calibri"/>
               </a:rPr>
-              <a:t>Lay out a cartel case: per se status, a screen to run, and a before/after overcharge — and state whether passing-on is available in the forum.</a:t>
-            </a:r>
-          </a:p>
-          <a:p>
-            <a:pPr algn="l">
-              <a:lnSpc>
-                <a:spcPct val="108000"/>
-              </a:lnSpc>
-              <a:spcAft>
-                <a:spcPts val="1400"/>
-              </a:spcAft>
-            </a:pPr>
-            <a:r>
-              <a:rPr sz="2000" b="1" i="0">
-                <a:solidFill>
-                  <a:srgbClr val="E69F00"/>
-                </a:solidFill>
-                <a:latin typeface="Calibri"/>
-              </a:rPr>
-              <a:t>2.  </a:t>
-            </a:r>
+              <a:t>•  SA — market inquiries: investigative, forward-looking remedies, fast for moving markets; reaches harms without a contested abuse finding.</a:t>
+            </a:r>
+          </a:p>
+          <a:p>
+            <a:pPr algn="l">
+              <a:lnSpc>
+                <a:spcPct val="105000"/>
+              </a:lnSpc>
+              <a:spcAft>
+                <a:spcPts val="900"/>
+              </a:spcAft>
+            </a:pPr>
             <a:r>
               <a:rPr sz="2000" b="0" i="0">
                 <a:solidFill>
@@ -19148,27 +19376,18 @@
                 </a:solidFill>
                 <a:latin typeface="Calibri"/>
               </a:rPr>
-              <a:t>Use the econometric backbone: read an OLS output, spot endogeneity, and run a DiD or event study a tribunal can follow.</a:t>
-            </a:r>
-          </a:p>
-          <a:p>
-            <a:pPr algn="l">
-              <a:lnSpc>
-                <a:spcPct val="108000"/>
-              </a:lnSpc>
-              <a:spcAft>
-                <a:spcPts val="1400"/>
-              </a:spcAft>
-            </a:pPr>
-            <a:r>
-              <a:rPr sz="2000" b="1" i="0">
-                <a:solidFill>
-                  <a:srgbClr val="E69F00"/>
-                </a:solidFill>
-                <a:latin typeface="Calibri"/>
-              </a:rPr>
-              <a:t>3.  </a:t>
-            </a:r>
+              <a:t>•  EU — DMA: ex ante obligations on designated gatekeepers; harm presumed from the structure, enforced by fines.</a:t>
+            </a:r>
+          </a:p>
+          <a:p>
+            <a:pPr algn="l">
+              <a:lnSpc>
+                <a:spcPct val="105000"/>
+              </a:lnSpc>
+              <a:spcAft>
+                <a:spcPts val="900"/>
+              </a:spcAft>
+            </a:pPr>
             <a:r>
               <a:rPr sz="2000" b="0" i="0">
                 <a:solidFill>
@@ -19176,27 +19395,18 @@
                 </a:solidFill>
                 <a:latin typeface="Calibri"/>
               </a:rPr>
-              <a:t>Structure an abuse case (dominance -&gt; conduct -&gt; justification) and apply the cost/AEC test to predation and margin squeeze.</a:t>
-            </a:r>
-          </a:p>
-          <a:p>
-            <a:pPr algn="l">
-              <a:lnSpc>
-                <a:spcPct val="108000"/>
-              </a:lnSpc>
-              <a:spcAft>
-                <a:spcPts val="1400"/>
-              </a:spcAft>
-            </a:pPr>
-            <a:r>
-              <a:rPr sz="2000" b="1" i="0">
-                <a:solidFill>
-                  <a:srgbClr val="E69F00"/>
-                </a:solidFill>
-                <a:latin typeface="Calibri"/>
-              </a:rPr>
-              <a:t>4.  </a:t>
-            </a:r>
+              <a:t>•  US — litigation: ex post case-by-case under Sherman §2; high proof burden, long remedy phase.</a:t>
+            </a:r>
+          </a:p>
+          <a:p>
+            <a:pPr algn="l">
+              <a:lnSpc>
+                <a:spcPct val="105000"/>
+              </a:lnSpc>
+              <a:spcAft>
+                <a:spcPts val="900"/>
+              </a:spcAft>
+            </a:pPr>
             <a:r>
               <a:rPr sz="2000" b="0" i="0">
                 <a:solidFill>
@@ -19204,35 +19414,7 @@
                 </a:solidFill>
                 <a:latin typeface="Calibri"/>
               </a:rPr>
-              <a:t>Carry the SA appellate history: Sasol set aside (2015), Media24 overturned (2019); treat Intel's AEC analysis as unwound and Microsoft as §2 maintenance.</a:t>
-            </a:r>
-          </a:p>
-          <a:p>
-            <a:pPr algn="l">
-              <a:lnSpc>
-                <a:spcPct val="108000"/>
-              </a:lnSpc>
-              <a:spcAft>
-                <a:spcPts val="1400"/>
-              </a:spcAft>
-            </a:pPr>
-            <a:r>
-              <a:rPr sz="2000" b="1" i="0">
-                <a:solidFill>
-                  <a:srgbClr val="E69F00"/>
-                </a:solidFill>
-                <a:latin typeface="Calibri"/>
-              </a:rPr>
-              <a:t>5.  </a:t>
-            </a:r>
-            <a:r>
-              <a:rPr sz="2000" b="0" i="0">
-                <a:solidFill>
-                  <a:srgbClr val="222222"/>
-                </a:solidFill>
-                <a:latin typeface="Calibri"/>
-              </a:rPr>
-              <a:t>Compute a labour HHI and a wage markdown; apply old theories of harm to platforms with SSNDQ and ranking/default measurement, framed to the forum (SA inquiry vs EU DMA vs US litigation).</a:t>
+              <a:t>•  For the expert: the measurement is the same (ranking, defaults, foreclosure); what differs is what you must prove and when — frame your number to the forum.</a:t>
             </a:r>
           </a:p>
         </p:txBody>
@@ -19288,6 +19470,785 @@
 </file>
 
 <file path=ppt/slides/slide56.xml><?xml version="1.0" encoding="utf-8"?>
+<p:sld xmlns:a="http://schemas.openxmlformats.org/drawingml/2006/main" xmlns:p="http://schemas.openxmlformats.org/presentationml/2006/main" xmlns:r="http://schemas.openxmlformats.org/officeDocument/2006/relationships">
+  <p:cSld>
+    <p:spTree>
+      <p:nvGrpSpPr>
+        <p:cNvPr id="1" name=""/>
+        <p:cNvGrpSpPr/>
+        <p:nvPr/>
+      </p:nvGrpSpPr>
+      <p:grpSpPr/>
+      <p:sp>
+        <p:nvSpPr>
+          <p:cNvPr id="2" name="Rectangle 1"/>
+          <p:cNvSpPr/>
+          <p:nvPr/>
+        </p:nvSpPr>
+        <p:spPr>
+          <a:xfrm>
+            <a:off x="0" y="0"/>
+            <a:ext cx="12191695" cy="960120"/>
+          </a:xfrm>
+          <a:prstGeom prst="rect">
+            <a:avLst/>
+          </a:prstGeom>
+          <a:solidFill>
+            <a:srgbClr val="009E73"/>
+          </a:solidFill>
+          <a:ln>
+            <a:noFill/>
+          </a:ln>
+          <a:effectLst/>
+        </p:spPr>
+        <p:style>
+          <a:lnRef idx="1">
+            <a:schemeClr val="accent1"/>
+          </a:lnRef>
+          <a:fillRef idx="3">
+            <a:schemeClr val="accent1"/>
+          </a:fillRef>
+          <a:effectRef idx="2">
+            <a:schemeClr val="accent1"/>
+          </a:effectRef>
+          <a:fontRef idx="minor">
+            <a:schemeClr val="lt1"/>
+          </a:fontRef>
+        </p:style>
+        <p:txBody>
+          <a:bodyPr rtlCol="0" anchor="ctr"/>
+          <a:lstStyle/>
+          <a:p>
+            <a:pPr algn="ctr"/>
+          </a:p>
+        </p:txBody>
+      </p:sp>
+      <p:sp>
+        <p:nvSpPr>
+          <p:cNvPr id="3" name="TextBox 2"/>
+          <p:cNvSpPr txBox="1"/>
+          <p:nvPr/>
+        </p:nvSpPr>
+        <p:spPr>
+          <a:xfrm>
+            <a:off x="457200" y="109728"/>
+            <a:ext cx="11247120" cy="731520"/>
+          </a:xfrm>
+          <a:prstGeom prst="rect">
+            <a:avLst/>
+          </a:prstGeom>
+          <a:noFill/>
+        </p:spPr>
+        <p:txBody>
+          <a:bodyPr wrap="square" anchor="ctr">
+            <a:spAutoFit/>
+          </a:bodyPr>
+          <a:lstStyle/>
+          <a:p>
+            <a:pPr algn="l">
+              <a:lnSpc>
+                <a:spcPct val="100000"/>
+              </a:lnSpc>
+              <a:spcAft>
+                <a:spcPts val="600"/>
+              </a:spcAft>
+            </a:pPr>
+            <a:r>
+              <a:rPr sz="2800" b="1" i="0">
+                <a:solidFill>
+                  <a:srgbClr val="FFFFFF"/>
+                </a:solidFill>
+                <a:latin typeface="Calibri"/>
+              </a:rPr>
+              <a:t>Online Intermediation Platforms Market Inquiry (OIPMI)</a:t>
+            </a:r>
+          </a:p>
+        </p:txBody>
+      </p:sp>
+      <p:sp>
+        <p:nvSpPr>
+          <p:cNvPr id="4" name="Rectangle 3"/>
+          <p:cNvSpPr/>
+          <p:nvPr/>
+        </p:nvSpPr>
+        <p:spPr>
+          <a:xfrm>
+            <a:off x="548640" y="1188720"/>
+            <a:ext cx="1463040" cy="457200"/>
+          </a:xfrm>
+          <a:prstGeom prst="rect">
+            <a:avLst/>
+          </a:prstGeom>
+          <a:solidFill>
+            <a:srgbClr val="009E73"/>
+          </a:solidFill>
+          <a:ln>
+            <a:noFill/>
+          </a:ln>
+          <a:effectLst/>
+        </p:spPr>
+        <p:style>
+          <a:lnRef idx="1">
+            <a:schemeClr val="accent1"/>
+          </a:lnRef>
+          <a:fillRef idx="3">
+            <a:schemeClr val="accent1"/>
+          </a:fillRef>
+          <a:effectRef idx="2">
+            <a:schemeClr val="accent1"/>
+          </a:effectRef>
+          <a:fontRef idx="minor">
+            <a:schemeClr val="lt1"/>
+          </a:fontRef>
+        </p:style>
+        <p:txBody>
+          <a:bodyPr rtlCol="0" anchor="ctr"/>
+          <a:lstStyle/>
+          <a:p>
+            <a:pPr algn="ctr"/>
+          </a:p>
+        </p:txBody>
+      </p:sp>
+      <p:sp>
+        <p:nvSpPr>
+          <p:cNvPr id="5" name="TextBox 4"/>
+          <p:cNvSpPr txBox="1"/>
+          <p:nvPr/>
+        </p:nvSpPr>
+        <p:spPr>
+          <a:xfrm>
+            <a:off x="548640" y="1207008"/>
+            <a:ext cx="1463040" cy="420624"/>
+          </a:xfrm>
+          <a:prstGeom prst="rect">
+            <a:avLst/>
+          </a:prstGeom>
+          <a:noFill/>
+        </p:spPr>
+        <p:txBody>
+          <a:bodyPr wrap="square" anchor="ctr">
+            <a:spAutoFit/>
+          </a:bodyPr>
+          <a:lstStyle/>
+          <a:p>
+            <a:pPr algn="ctr">
+              <a:lnSpc>
+                <a:spcPct val="100000"/>
+              </a:lnSpc>
+              <a:spcAft>
+                <a:spcPts val="600"/>
+              </a:spcAft>
+            </a:pPr>
+            <a:r>
+              <a:rPr sz="1800" b="1" i="0">
+                <a:solidFill>
+                  <a:srgbClr val="FFFFFF"/>
+                </a:solidFill>
+                <a:latin typeface="Calibri"/>
+              </a:rPr>
+              <a:t>SA</a:t>
+            </a:r>
+          </a:p>
+        </p:txBody>
+      </p:sp>
+      <p:sp>
+        <p:nvSpPr>
+          <p:cNvPr id="6" name="TextBox 5"/>
+          <p:cNvSpPr txBox="1"/>
+          <p:nvPr/>
+        </p:nvSpPr>
+        <p:spPr>
+          <a:xfrm>
+            <a:off x="2194560" y="1188720"/>
+            <a:ext cx="9418320" cy="548640"/>
+          </a:xfrm>
+          <a:prstGeom prst="rect">
+            <a:avLst/>
+          </a:prstGeom>
+          <a:noFill/>
+        </p:spPr>
+        <p:txBody>
+          <a:bodyPr wrap="square" anchor="ctr">
+            <a:spAutoFit/>
+          </a:bodyPr>
+          <a:lstStyle/>
+          <a:p>
+            <a:pPr algn="l">
+              <a:lnSpc>
+                <a:spcPct val="100000"/>
+              </a:lnSpc>
+              <a:spcAft>
+                <a:spcPts val="600"/>
+              </a:spcAft>
+            </a:pPr>
+            <a:r>
+              <a:rPr sz="1800" b="1" i="0">
+                <a:solidFill>
+                  <a:srgbClr val="009E73"/>
+                </a:solidFill>
+                <a:latin typeface="Calibri"/>
+              </a:rPr>
+              <a:t>Self-preferencing and platform dependence, SA-style remedies</a:t>
+            </a:r>
+          </a:p>
+        </p:txBody>
+      </p:sp>
+      <p:sp>
+        <p:nvSpPr>
+          <p:cNvPr id="7" name="TextBox 6"/>
+          <p:cNvSpPr txBox="1"/>
+          <p:nvPr/>
+        </p:nvSpPr>
+        <p:spPr>
+          <a:xfrm>
+            <a:off x="548640" y="1920240"/>
+            <a:ext cx="11064240" cy="3108960"/>
+          </a:xfrm>
+          <a:prstGeom prst="rect">
+            <a:avLst/>
+          </a:prstGeom>
+          <a:noFill/>
+        </p:spPr>
+        <p:txBody>
+          <a:bodyPr wrap="square" anchor="t">
+            <a:spAutoFit/>
+          </a:bodyPr>
+          <a:lstStyle/>
+          <a:p>
+            <a:pPr algn="l">
+              <a:lnSpc>
+                <a:spcPct val="104000"/>
+              </a:lnSpc>
+              <a:spcAft>
+                <a:spcPts val="700"/>
+              </a:spcAft>
+            </a:pPr>
+            <a:r>
+              <a:rPr sz="1500" b="1" i="0">
+                <a:solidFill>
+                  <a:srgbClr val="555555"/>
+                </a:solidFill>
+                <a:latin typeface="Calibri"/>
+              </a:rPr>
+              <a:t>Facts &amp; analysis</a:t>
+            </a:r>
+          </a:p>
+          <a:p>
+            <a:pPr algn="l">
+              <a:lnSpc>
+                <a:spcPct val="104000"/>
+              </a:lnSpc>
+              <a:spcAft>
+                <a:spcPts val="700"/>
+              </a:spcAft>
+            </a:pPr>
+            <a:r>
+              <a:rPr sz="1600" b="0" i="0">
+                <a:solidFill>
+                  <a:srgbClr val="222222"/>
+                </a:solidFill>
+                <a:latin typeface="Calibri"/>
+              </a:rPr>
+              <a:t>•  Final report (2023): e-commerce (Takealot marketplace ranking vs. its own retail arm), food delivery (commissions ~25–30%), online travel, and Google's &gt;90% SA search share.</a:t>
+            </a:r>
+          </a:p>
+          <a:p>
+            <a:pPr algn="l">
+              <a:lnSpc>
+                <a:spcPct val="104000"/>
+              </a:lnSpc>
+              <a:spcAft>
+                <a:spcPts val="700"/>
+              </a:spcAft>
+            </a:pPr>
+            <a:r>
+              <a:rPr sz="1600" b="0" i="0">
+                <a:solidFill>
+                  <a:srgbClr val="222222"/>
+                </a:solidFill>
+                <a:latin typeface="Calibri"/>
+              </a:rPr>
+              <a:t>•  Remedies: fair-ranking reporting, anti-steering relief for restaurants, and data/visibility transparency.</a:t>
+            </a:r>
+          </a:p>
+          <a:p>
+            <a:pPr algn="l">
+              <a:lnSpc>
+                <a:spcPct val="104000"/>
+              </a:lnSpc>
+              <a:spcAft>
+                <a:spcPts val="700"/>
+              </a:spcAft>
+            </a:pPr>
+            <a:r>
+              <a:rPr sz="1600" b="0" i="0">
+                <a:solidFill>
+                  <a:srgbClr val="222222"/>
+                </a:solidFill>
+                <a:latin typeface="Calibri"/>
+              </a:rPr>
+              <a:t>•  A market-inquiry remedy package, not a litigated abuse finding — the SA tool of choice for fast-moving digital markets.</a:t>
+            </a:r>
+          </a:p>
+        </p:txBody>
+      </p:sp>
+      <p:sp>
+        <p:nvSpPr>
+          <p:cNvPr id="8" name="Rectangle 7"/>
+          <p:cNvSpPr/>
+          <p:nvPr/>
+        </p:nvSpPr>
+        <p:spPr>
+          <a:xfrm>
+            <a:off x="548640" y="5212080"/>
+            <a:ext cx="11064240" cy="1005840"/>
+          </a:xfrm>
+          <a:prstGeom prst="rect">
+            <a:avLst/>
+          </a:prstGeom>
+          <a:solidFill>
+            <a:srgbClr val="F2F2F2"/>
+          </a:solidFill>
+          <a:ln w="12700">
+            <a:solidFill>
+              <a:srgbClr val="009E73"/>
+            </a:solidFill>
+          </a:ln>
+          <a:effectLst/>
+        </p:spPr>
+        <p:style>
+          <a:lnRef idx="1">
+            <a:schemeClr val="accent1"/>
+          </a:lnRef>
+          <a:fillRef idx="3">
+            <a:schemeClr val="accent1"/>
+          </a:fillRef>
+          <a:effectRef idx="2">
+            <a:schemeClr val="accent1"/>
+          </a:effectRef>
+          <a:fontRef idx="minor">
+            <a:schemeClr val="lt1"/>
+          </a:fontRef>
+        </p:style>
+        <p:txBody>
+          <a:bodyPr rtlCol="0" anchor="ctr"/>
+          <a:lstStyle/>
+          <a:p>
+            <a:pPr algn="ctr"/>
+          </a:p>
+        </p:txBody>
+      </p:sp>
+      <p:sp>
+        <p:nvSpPr>
+          <p:cNvPr id="9" name="TextBox 8"/>
+          <p:cNvSpPr txBox="1"/>
+          <p:nvPr/>
+        </p:nvSpPr>
+        <p:spPr>
+          <a:xfrm>
+            <a:off x="731520" y="5303520"/>
+            <a:ext cx="10698480" cy="868680"/>
+          </a:xfrm>
+          <a:prstGeom prst="rect">
+            <a:avLst/>
+          </a:prstGeom>
+          <a:noFill/>
+        </p:spPr>
+        <p:txBody>
+          <a:bodyPr wrap="square" anchor="ctr">
+            <a:spAutoFit/>
+          </a:bodyPr>
+          <a:lstStyle/>
+          <a:p>
+            <a:pPr algn="l">
+              <a:lnSpc>
+                <a:spcPct val="103000"/>
+              </a:lnSpc>
+              <a:spcAft>
+                <a:spcPts val="600"/>
+              </a:spcAft>
+            </a:pPr>
+            <a:r>
+              <a:rPr sz="1600" b="1" i="0">
+                <a:solidFill>
+                  <a:srgbClr val="009E73"/>
+                </a:solidFill>
+                <a:latin typeface="Calibri"/>
+              </a:rPr>
+              <a:t>Why it matters:  </a:t>
+            </a:r>
+            <a:r>
+              <a:rPr sz="1600" b="0" i="0">
+                <a:solidFill>
+                  <a:srgbClr val="222222"/>
+                </a:solidFill>
+                <a:latin typeface="Calibri"/>
+              </a:rPr>
+              <a:t>SA reaches platform harms through market inquiries with forward-looking remedies, in parallel with the EU's ex ante DMA — both contrast with US case-by-case litigation.</a:t>
+            </a:r>
+          </a:p>
+        </p:txBody>
+      </p:sp>
+      <p:sp>
+        <p:nvSpPr>
+          <p:cNvPr id="10" name="TextBox 9"/>
+          <p:cNvSpPr txBox="1"/>
+          <p:nvPr/>
+        </p:nvSpPr>
+        <p:spPr>
+          <a:xfrm>
+            <a:off x="457200" y="6446520"/>
+            <a:ext cx="11247120" cy="320040"/>
+          </a:xfrm>
+          <a:prstGeom prst="rect">
+            <a:avLst/>
+          </a:prstGeom>
+          <a:noFill/>
+        </p:spPr>
+        <p:txBody>
+          <a:bodyPr wrap="square" anchor="t">
+            <a:spAutoFit/>
+          </a:bodyPr>
+          <a:lstStyle/>
+          <a:p>
+            <a:pPr algn="l">
+              <a:lnSpc>
+                <a:spcPct val="100000"/>
+              </a:lnSpc>
+              <a:spcAft>
+                <a:spcPts val="600"/>
+              </a:spcAft>
+            </a:pPr>
+            <a:r>
+              <a:rPr sz="1000" b="0" i="0">
+                <a:solidFill>
+                  <a:srgbClr val="555555"/>
+                </a:solidFill>
+                <a:latin typeface="Calibri"/>
+              </a:rPr>
+              <a:t>Day 2 · Conduct</a:t>
+            </a:r>
+          </a:p>
+        </p:txBody>
+      </p:sp>
+    </p:spTree>
+  </p:cSld>
+  <p:clrMapOvr>
+    <a:masterClrMapping/>
+  </p:clrMapOvr>
+</p:sld>
+</file>
+
+<file path=ppt/slides/slide57.xml><?xml version="1.0" encoding="utf-8"?>
+<p:sld xmlns:a="http://schemas.openxmlformats.org/drawingml/2006/main" xmlns:p="http://schemas.openxmlformats.org/presentationml/2006/main" xmlns:r="http://schemas.openxmlformats.org/officeDocument/2006/relationships">
+  <p:cSld>
+    <p:spTree>
+      <p:nvGrpSpPr>
+        <p:cNvPr id="1" name=""/>
+        <p:cNvGrpSpPr/>
+        <p:nvPr/>
+      </p:nvGrpSpPr>
+      <p:grpSpPr/>
+      <p:sp>
+        <p:nvSpPr>
+          <p:cNvPr id="2" name="Rectangle 1"/>
+          <p:cNvSpPr/>
+          <p:nvPr/>
+        </p:nvSpPr>
+        <p:spPr>
+          <a:xfrm>
+            <a:off x="0" y="0"/>
+            <a:ext cx="12191695" cy="960120"/>
+          </a:xfrm>
+          <a:prstGeom prst="rect">
+            <a:avLst/>
+          </a:prstGeom>
+          <a:solidFill>
+            <a:srgbClr val="222222"/>
+          </a:solidFill>
+          <a:ln>
+            <a:noFill/>
+          </a:ln>
+          <a:effectLst/>
+        </p:spPr>
+        <p:style>
+          <a:lnRef idx="1">
+            <a:schemeClr val="accent1"/>
+          </a:lnRef>
+          <a:fillRef idx="3">
+            <a:schemeClr val="accent1"/>
+          </a:fillRef>
+          <a:effectRef idx="2">
+            <a:schemeClr val="accent1"/>
+          </a:effectRef>
+          <a:fontRef idx="minor">
+            <a:schemeClr val="lt1"/>
+          </a:fontRef>
+        </p:style>
+        <p:txBody>
+          <a:bodyPr rtlCol="0" anchor="ctr"/>
+          <a:lstStyle/>
+          <a:p>
+            <a:pPr algn="ctr"/>
+          </a:p>
+        </p:txBody>
+      </p:sp>
+      <p:sp>
+        <p:nvSpPr>
+          <p:cNvPr id="3" name="TextBox 2"/>
+          <p:cNvSpPr txBox="1"/>
+          <p:nvPr/>
+        </p:nvSpPr>
+        <p:spPr>
+          <a:xfrm>
+            <a:off x="457200" y="109728"/>
+            <a:ext cx="11247120" cy="731520"/>
+          </a:xfrm>
+          <a:prstGeom prst="rect">
+            <a:avLst/>
+          </a:prstGeom>
+          <a:noFill/>
+        </p:spPr>
+        <p:txBody>
+          <a:bodyPr wrap="square" anchor="ctr">
+            <a:spAutoFit/>
+          </a:bodyPr>
+          <a:lstStyle/>
+          <a:p>
+            <a:pPr algn="l">
+              <a:lnSpc>
+                <a:spcPct val="100000"/>
+              </a:lnSpc>
+              <a:spcAft>
+                <a:spcPts val="600"/>
+              </a:spcAft>
+            </a:pPr>
+            <a:r>
+              <a:rPr sz="2800" b="1" i="0">
+                <a:solidFill>
+                  <a:srgbClr val="FFFFFF"/>
+                </a:solidFill>
+                <a:latin typeface="Calibri"/>
+              </a:rPr>
+              <a:t>Day 2 — what you should now be able to do</a:t>
+            </a:r>
+          </a:p>
+        </p:txBody>
+      </p:sp>
+      <p:sp>
+        <p:nvSpPr>
+          <p:cNvPr id="4" name="TextBox 3"/>
+          <p:cNvSpPr txBox="1"/>
+          <p:nvPr/>
+        </p:nvSpPr>
+        <p:spPr>
+          <a:xfrm>
+            <a:off x="640080" y="1280160"/>
+            <a:ext cx="10972800" cy="4937760"/>
+          </a:xfrm>
+          <a:prstGeom prst="rect">
+            <a:avLst/>
+          </a:prstGeom>
+          <a:noFill/>
+        </p:spPr>
+        <p:txBody>
+          <a:bodyPr wrap="square" anchor="t">
+            <a:spAutoFit/>
+          </a:bodyPr>
+          <a:lstStyle/>
+          <a:p>
+            <a:pPr algn="l">
+              <a:lnSpc>
+                <a:spcPct val="108000"/>
+              </a:lnSpc>
+              <a:spcAft>
+                <a:spcPts val="1400"/>
+              </a:spcAft>
+            </a:pPr>
+            <a:r>
+              <a:rPr sz="2000" b="1" i="0">
+                <a:solidFill>
+                  <a:srgbClr val="E69F00"/>
+                </a:solidFill>
+                <a:latin typeface="Calibri"/>
+              </a:rPr>
+              <a:t>1.  </a:t>
+            </a:r>
+            <a:r>
+              <a:rPr sz="2000" b="0" i="0">
+                <a:solidFill>
+                  <a:srgbClr val="222222"/>
+                </a:solidFill>
+                <a:latin typeface="Calibri"/>
+              </a:rPr>
+              <a:t>Lay out a cartel case: per se status, a screen to run, and a before/after overcharge — and state whether passing-on is available in the forum.</a:t>
+            </a:r>
+          </a:p>
+          <a:p>
+            <a:pPr algn="l">
+              <a:lnSpc>
+                <a:spcPct val="108000"/>
+              </a:lnSpc>
+              <a:spcAft>
+                <a:spcPts val="1400"/>
+              </a:spcAft>
+            </a:pPr>
+            <a:r>
+              <a:rPr sz="2000" b="1" i="0">
+                <a:solidFill>
+                  <a:srgbClr val="E69F00"/>
+                </a:solidFill>
+                <a:latin typeface="Calibri"/>
+              </a:rPr>
+              <a:t>2.  </a:t>
+            </a:r>
+            <a:r>
+              <a:rPr sz="2000" b="0" i="0">
+                <a:solidFill>
+                  <a:srgbClr val="222222"/>
+                </a:solidFill>
+                <a:latin typeface="Calibri"/>
+              </a:rPr>
+              <a:t>Use the econometric backbone: read an OLS output, spot endogeneity, and run a DiD or event study a tribunal can follow.</a:t>
+            </a:r>
+          </a:p>
+          <a:p>
+            <a:pPr algn="l">
+              <a:lnSpc>
+                <a:spcPct val="108000"/>
+              </a:lnSpc>
+              <a:spcAft>
+                <a:spcPts val="1400"/>
+              </a:spcAft>
+            </a:pPr>
+            <a:r>
+              <a:rPr sz="2000" b="1" i="0">
+                <a:solidFill>
+                  <a:srgbClr val="E69F00"/>
+                </a:solidFill>
+                <a:latin typeface="Calibri"/>
+              </a:rPr>
+              <a:t>3.  </a:t>
+            </a:r>
+            <a:r>
+              <a:rPr sz="2000" b="0" i="0">
+                <a:solidFill>
+                  <a:srgbClr val="222222"/>
+                </a:solidFill>
+                <a:latin typeface="Calibri"/>
+              </a:rPr>
+              <a:t>Structure an abuse case (dominance -&gt; conduct -&gt; justification) and apply the cost/AEC test to predation and margin squeeze.</a:t>
+            </a:r>
+          </a:p>
+          <a:p>
+            <a:pPr algn="l">
+              <a:lnSpc>
+                <a:spcPct val="108000"/>
+              </a:lnSpc>
+              <a:spcAft>
+                <a:spcPts val="1400"/>
+              </a:spcAft>
+            </a:pPr>
+            <a:r>
+              <a:rPr sz="2000" b="1" i="0">
+                <a:solidFill>
+                  <a:srgbClr val="E69F00"/>
+                </a:solidFill>
+                <a:latin typeface="Calibri"/>
+              </a:rPr>
+              <a:t>4.  </a:t>
+            </a:r>
+            <a:r>
+              <a:rPr sz="2000" b="0" i="0">
+                <a:solidFill>
+                  <a:srgbClr val="222222"/>
+                </a:solidFill>
+                <a:latin typeface="Calibri"/>
+              </a:rPr>
+              <a:t>Carry the SA appellate history: Sasol set aside (2015), Media24 overturned (2019); treat Intel's AEC analysis as unwound and Microsoft as §2 maintenance.</a:t>
+            </a:r>
+          </a:p>
+          <a:p>
+            <a:pPr algn="l">
+              <a:lnSpc>
+                <a:spcPct val="108000"/>
+              </a:lnSpc>
+              <a:spcAft>
+                <a:spcPts val="1400"/>
+              </a:spcAft>
+            </a:pPr>
+            <a:r>
+              <a:rPr sz="2000" b="1" i="0">
+                <a:solidFill>
+                  <a:srgbClr val="E69F00"/>
+                </a:solidFill>
+                <a:latin typeface="Calibri"/>
+              </a:rPr>
+              <a:t>5.  </a:t>
+            </a:r>
+            <a:r>
+              <a:rPr sz="2000" b="0" i="0">
+                <a:solidFill>
+                  <a:srgbClr val="222222"/>
+                </a:solidFill>
+                <a:latin typeface="Calibri"/>
+              </a:rPr>
+              <a:t>Compute a labour HHI and a wage markdown; apply old theories of harm to platforms with SSNDQ and ranking/default measurement, framed to the forum (SA inquiry vs EU DMA vs US litigation).</a:t>
+            </a:r>
+          </a:p>
+        </p:txBody>
+      </p:sp>
+      <p:sp>
+        <p:nvSpPr>
+          <p:cNvPr id="5" name="TextBox 4"/>
+          <p:cNvSpPr txBox="1"/>
+          <p:nvPr/>
+        </p:nvSpPr>
+        <p:spPr>
+          <a:xfrm>
+            <a:off x="457200" y="6446520"/>
+            <a:ext cx="11247120" cy="320040"/>
+          </a:xfrm>
+          <a:prstGeom prst="rect">
+            <a:avLst/>
+          </a:prstGeom>
+          <a:noFill/>
+        </p:spPr>
+        <p:txBody>
+          <a:bodyPr wrap="square" anchor="t">
+            <a:spAutoFit/>
+          </a:bodyPr>
+          <a:lstStyle/>
+          <a:p>
+            <a:pPr algn="l">
+              <a:lnSpc>
+                <a:spcPct val="100000"/>
+              </a:lnSpc>
+              <a:spcAft>
+                <a:spcPts val="600"/>
+              </a:spcAft>
+            </a:pPr>
+            <a:r>
+              <a:rPr sz="1000" b="0" i="0">
+                <a:solidFill>
+                  <a:srgbClr val="555555"/>
+                </a:solidFill>
+                <a:latin typeface="Calibri"/>
+              </a:rPr>
+              <a:t>Day 2 · Conduct</a:t>
+            </a:r>
+          </a:p>
+        </p:txBody>
+      </p:sp>
+    </p:spTree>
+  </p:cSld>
+  <p:clrMapOvr>
+    <a:masterClrMapping/>
+  </p:clrMapOvr>
+</p:sld>
+</file>
+
+<file path=ppt/slides/slide58.xml><?xml version="1.0" encoding="utf-8"?>
 <p:sld xmlns:a="http://schemas.openxmlformats.org/drawingml/2006/main" xmlns:p="http://schemas.openxmlformats.org/presentationml/2006/main" xmlns:r="http://schemas.openxmlformats.org/officeDocument/2006/relationships">
   <p:cSld>
     <p:spTree>

--- a/teaching/slides/day2_conduct.pptx
+++ b/teaching/slides/day2_conduct.pptx
@@ -16630,7 +16630,7 @@
                 </a:solidFill>
                 <a:latin typeface="Calibri"/>
               </a:rPr>
-              <a:t>•  For the expert: build the labour HHI by occupation × region, then connect concentration to the wage markdown the supply elasticity implies.</a:t>
+              <a:t>•  For the expert: build the labour HHI by occupation × region, then connect concentration to the wage markdown implied by the supply elasticity.</a:t>
             </a:r>
           </a:p>
         </p:txBody>
